--- a/slides/sports_nutritionist_lecture.pptx
+++ b/slides/sports_nutritionist_lecture.pptx
@@ -17,9 +17,10 @@
     <p:sldId id="265" r:id="rId11"/>
     <p:sldId id="266" r:id="rId12"/>
     <p:sldId id="267" r:id="rId13"/>
+    <p:sldId id="268" r:id="rId14"/>
   </p:sldIdLst>
   <p:notesMasterIdLst>
-    <p:notesMasterId r:id="rId14"/>
+    <p:notesMasterId r:id="rId15"/>
   </p:notesMasterIdLst>
   <p:sldSz cx="12192000" cy="6858000"/>
   <p:notesSz cx="6858000" cy="12192000"/>
@@ -819,6 +820,94 @@
 </p:notes>
 </file>
 
+<file path=ppt/notesSlides/notesSlide13.xml><?xml version="1.0" encoding="utf-8"?>
+<p:notes xmlns:a="http://schemas.openxmlformats.org/drawingml/2006/main" xmlns:r="http://schemas.openxmlformats.org/officeDocument/2006/relationships" xmlns:p="http://schemas.openxmlformats.org/presentationml/2006/main">
+  <p:cSld>
+    <p:spTree>
+      <p:nvGrpSpPr>
+        <p:cNvPr id="1" name=""/>
+        <p:cNvGrpSpPr/>
+        <p:nvPr/>
+      </p:nvGrpSpPr>
+      <p:grpSpPr>
+        <a:xfrm>
+          <a:off x="0" y="0"/>
+          <a:ext cx="0" cy="0"/>
+          <a:chOff x="0" y="0"/>
+          <a:chExt cx="0" cy="0"/>
+        </a:xfrm>
+      </p:grpSpPr>
+      <p:sp>
+        <p:nvSpPr>
+          <p:cNvPr id="2" name="Slide Image Placeholder 1"/>
+          <p:cNvSpPr>
+            <a:spLocks noGrp="1" noRot="1" noChangeAspect="1"/>
+          </p:cNvSpPr>
+          <p:nvPr>
+            <p:ph type="sldImg"/>
+          </p:nvPr>
+        </p:nvSpPr>
+        <p:spPr/>
+      </p:sp>
+      <p:sp>
+        <p:nvSpPr>
+          <p:cNvPr id="3" name="Notes Placeholder 2"/>
+          <p:cNvSpPr>
+            <a:spLocks noGrp="1"/>
+          </p:cNvSpPr>
+          <p:nvPr>
+            <p:ph type="body" idx="1"/>
+          </p:nvPr>
+        </p:nvSpPr>
+        <p:spPr/>
+        <p:txBody>
+          <a:bodyPr/>
+          <a:lstStyle/>
+          <a:p>
+            <a:r>
+              <a:rPr lang="en-US" dirty="0"/>
+              <a:t/>
+            </a:r>
+            <a:endParaRPr lang="en-US" dirty="0"/>
+          </a:p>
+        </p:txBody>
+      </p:sp>
+      <p:sp>
+        <p:nvSpPr>
+          <p:cNvPr id="4" name="Slide Number Placeholder 3"/>
+          <p:cNvSpPr>
+            <a:spLocks noGrp="1"/>
+          </p:cNvSpPr>
+          <p:nvPr>
+            <p:ph type="sldNum" sz="quarter" idx="10"/>
+          </p:nvPr>
+        </p:nvSpPr>
+        <p:spPr/>
+        <p:txBody>
+          <a:bodyPr/>
+          <a:lstStyle/>
+          <a:p>
+            <a:fld id="{F7021451-1387-4CA6-816F-3879F97B5CBC}" type="slidenum">
+              <a:rPr lang="en-US"/>
+              <a:t>13</a:t>
+            </a:fld>
+            <a:endParaRPr lang="en-US"/>
+          </a:p>
+        </p:txBody>
+      </p:sp>
+    </p:spTree>
+    <p:extLst>
+      <p:ext uri="{BB962C8B-B14F-4D97-AF65-F5344CB8AC3E}">
+        <p14:creationId xmlns:p14="http://schemas.microsoft.com/office/powerpoint/2010/main" val="1024086991"/>
+      </p:ext>
+    </p:extLst>
+  </p:cSld>
+  <p:clrMapOvr>
+    <a:masterClrMapping/>
+  </p:clrMapOvr>
+</p:notes>
+</file>
+
 <file path=ppt/notesSlides/notesSlide2.xml><?xml version="1.0" encoding="utf-8"?>
 <p:notes xmlns:a="http://schemas.openxmlformats.org/drawingml/2006/main" xmlns:r="http://schemas.openxmlformats.org/officeDocument/2006/relationships" xmlns:p="http://schemas.openxmlformats.org/presentationml/2006/main">
   <p:cSld>
@@ -2227,6 +2316,1217 @@
     <p:bg>
       <p:bgPr>
         <a:solidFill>
+          <a:srgbClr val="FFFFFF"/>
+        </a:solidFill>
+      </p:bgPr>
+    </p:bg>
+    <p:spTree>
+      <p:nvGrpSpPr>
+        <p:cNvPr id="1" name=""/>
+        <p:cNvGrpSpPr/>
+        <p:nvPr/>
+      </p:nvGrpSpPr>
+      <p:grpSpPr>
+        <a:xfrm>
+          <a:off x="0" y="0"/>
+          <a:ext cx="0" cy="0"/>
+          <a:chOff x="0" y="0"/>
+          <a:chExt cx="0" cy="0"/>
+        </a:xfrm>
+      </p:grpSpPr>
+      <p:sp>
+        <p:nvSpPr>
+          <p:cNvPr id="2" name="Text 0"/>
+          <p:cNvSpPr/>
+          <p:nvPr/>
+        </p:nvSpPr>
+        <p:spPr>
+          <a:xfrm>
+            <a:off x="731520" y="457200"/>
+            <a:ext cx="9144000" cy="502920"/>
+          </a:xfrm>
+          <a:prstGeom prst="rect">
+            <a:avLst/>
+          </a:prstGeom>
+          <a:noFill/>
+          <a:ln/>
+        </p:spPr>
+        <p:txBody>
+          <a:bodyPr wrap="square" lIns="0" tIns="0" rIns="0" bIns="0" rtlCol="0" anchor="ctr"/>
+          <a:lstStyle/>
+          <a:p>
+            <a:pPr indent="0" marL="0">
+              <a:buNone/>
+            </a:pPr>
+            <a:r>
+              <a:rPr lang="en-US" sz="2600" b="1" dirty="0">
+                <a:solidFill>
+                  <a:srgbClr val="132A46"/>
+                </a:solidFill>
+                <a:latin typeface="Cambria" pitchFamily="34" charset="0"/>
+                <a:ea typeface="Cambria" pitchFamily="34" charset="-122"/>
+                <a:cs typeface="Cambria" pitchFamily="34" charset="-120"/>
+              </a:rPr>
+              <a:t>強さを生み出す「5つの皿」</a:t>
+            </a:r>
+            <a:endParaRPr lang="en-US" sz="2600" dirty="0"/>
+          </a:p>
+        </p:txBody>
+      </p:sp>
+      <p:sp>
+        <p:nvSpPr>
+          <p:cNvPr id="3" name="Text 1"/>
+          <p:cNvSpPr/>
+          <p:nvPr/>
+        </p:nvSpPr>
+        <p:spPr>
+          <a:xfrm>
+            <a:off x="731520" y="960120"/>
+            <a:ext cx="9144000" cy="365760"/>
+          </a:xfrm>
+          <a:prstGeom prst="rect">
+            <a:avLst/>
+          </a:prstGeom>
+          <a:noFill/>
+          <a:ln/>
+        </p:spPr>
+        <p:txBody>
+          <a:bodyPr wrap="square" lIns="0" tIns="0" rIns="0" bIns="0" rtlCol="0" anchor="ctr"/>
+          <a:lstStyle/>
+          <a:p>
+            <a:pPr indent="0" marL="0">
+              <a:buNone/>
+            </a:pPr>
+            <a:r>
+              <a:rPr lang="en-US" sz="1300" dirty="0">
+                <a:solidFill>
+                  <a:srgbClr val="5B6472"/>
+                </a:solidFill>
+                <a:latin typeface="Calibri" pitchFamily="34" charset="0"/>
+                <a:ea typeface="Calibri" pitchFamily="34" charset="-122"/>
+                <a:cs typeface="Calibri" pitchFamily="34" charset="-120"/>
+              </a:rPr>
+              <a:t>毎食このバランスを意識するだけで、カラダは変わる</a:t>
+            </a:r>
+            <a:endParaRPr lang="en-US" sz="1300" dirty="0"/>
+          </a:p>
+        </p:txBody>
+      </p:sp>
+      <p:sp>
+        <p:nvSpPr>
+          <p:cNvPr id="4" name="Shape 2"/>
+          <p:cNvSpPr/>
+          <p:nvPr/>
+        </p:nvSpPr>
+        <p:spPr>
+          <a:xfrm>
+            <a:off x="778612" y="1691640"/>
+            <a:ext cx="1965960" cy="2880360"/>
+          </a:xfrm>
+          <a:prstGeom prst="roundRect">
+            <a:avLst>
+              <a:gd name="adj" fmla="val 5581"/>
+            </a:avLst>
+          </a:prstGeom>
+          <a:solidFill>
+            <a:srgbClr val="132A46"/>
+          </a:solidFill>
+          <a:ln/>
+        </p:spPr>
+      </p:sp>
+      <p:sp>
+        <p:nvSpPr>
+          <p:cNvPr id="5" name="Shape 3"/>
+          <p:cNvSpPr/>
+          <p:nvPr/>
+        </p:nvSpPr>
+        <p:spPr>
+          <a:xfrm>
+            <a:off x="1304392" y="2011680"/>
+            <a:ext cx="914400" cy="914400"/>
+          </a:xfrm>
+          <a:prstGeom prst="ellipse">
+            <a:avLst/>
+          </a:prstGeom>
+          <a:solidFill>
+            <a:srgbClr val="F2A93B"/>
+          </a:solidFill>
+          <a:ln/>
+        </p:spPr>
+      </p:sp>
+      <p:pic>
+        <p:nvPicPr>
+          <p:cNvPr id="6" name="Image 0" descr="preencoded.png">    </p:cNvPr>
+          <p:cNvPicPr>
+            <a:picLocks noChangeAspect="1"/>
+          </p:cNvPicPr>
+          <p:nvPr/>
+        </p:nvPicPr>
+        <p:blipFill>
+          <a:blip r:embed="rId1"/>
+          <a:stretch>
+            <a:fillRect/>
+          </a:stretch>
+        </p:blipFill>
+        <p:spPr>
+          <a:xfrm>
+            <a:off x="1510132" y="2217420"/>
+            <a:ext cx="502920" cy="502920"/>
+          </a:xfrm>
+          <a:prstGeom prst="rect">
+            <a:avLst/>
+          </a:prstGeom>
+        </p:spPr>
+      </p:pic>
+      <p:sp>
+        <p:nvSpPr>
+          <p:cNvPr id="7" name="Text 4"/>
+          <p:cNvSpPr/>
+          <p:nvPr/>
+        </p:nvSpPr>
+        <p:spPr>
+          <a:xfrm>
+            <a:off x="778612" y="3154680"/>
+            <a:ext cx="1965960" cy="411480"/>
+          </a:xfrm>
+          <a:prstGeom prst="rect">
+            <a:avLst/>
+          </a:prstGeom>
+          <a:noFill/>
+          <a:ln/>
+        </p:spPr>
+        <p:txBody>
+          <a:bodyPr wrap="square" lIns="0" tIns="0" rIns="0" bIns="0" rtlCol="0" anchor="ctr"/>
+          <a:lstStyle/>
+          <a:p>
+            <a:pPr algn="ctr" indent="0" marL="0">
+              <a:buNone/>
+            </a:pPr>
+            <a:r>
+              <a:rPr lang="en-US" sz="1800" b="1" dirty="0">
+                <a:solidFill>
+                  <a:srgbClr val="FFFFFF"/>
+                </a:solidFill>
+                <a:latin typeface="Cambria" pitchFamily="34" charset="0"/>
+                <a:ea typeface="Cambria" pitchFamily="34" charset="-122"/>
+                <a:cs typeface="Cambria" pitchFamily="34" charset="-120"/>
+              </a:rPr>
+              <a:t>主食</a:t>
+            </a:r>
+            <a:endParaRPr lang="en-US" sz="1800" dirty="0"/>
+          </a:p>
+        </p:txBody>
+      </p:sp>
+      <p:sp>
+        <p:nvSpPr>
+          <p:cNvPr id="8" name="Text 5"/>
+          <p:cNvSpPr/>
+          <p:nvPr/>
+        </p:nvSpPr>
+        <p:spPr>
+          <a:xfrm>
+            <a:off x="778612" y="3657600"/>
+            <a:ext cx="1965960" cy="365760"/>
+          </a:xfrm>
+          <a:prstGeom prst="rect">
+            <a:avLst/>
+          </a:prstGeom>
+          <a:noFill/>
+          <a:ln/>
+        </p:spPr>
+        <p:txBody>
+          <a:bodyPr wrap="square" lIns="0" tIns="0" rIns="0" bIns="0" rtlCol="0" anchor="ctr"/>
+          <a:lstStyle/>
+          <a:p>
+            <a:pPr algn="ctr" indent="0" marL="0">
+              <a:buNone/>
+            </a:pPr>
+            <a:r>
+              <a:rPr lang="en-US" sz="1250" dirty="0">
+                <a:solidFill>
+                  <a:srgbClr val="C7D0DE"/>
+                </a:solidFill>
+                <a:latin typeface="Calibri" pitchFamily="34" charset="0"/>
+                <a:ea typeface="Calibri" pitchFamily="34" charset="-122"/>
+                <a:cs typeface="Calibri" pitchFamily="34" charset="-120"/>
+              </a:rPr>
+              <a:t>エネルギー</a:t>
+            </a:r>
+            <a:endParaRPr lang="en-US" sz="1250" dirty="0"/>
+          </a:p>
+        </p:txBody>
+      </p:sp>
+      <p:sp>
+        <p:nvSpPr>
+          <p:cNvPr id="9" name="Text 6"/>
+          <p:cNvSpPr/>
+          <p:nvPr/>
+        </p:nvSpPr>
+        <p:spPr>
+          <a:xfrm>
+            <a:off x="888340" y="1764792"/>
+            <a:ext cx="457200" cy="365760"/>
+          </a:xfrm>
+          <a:prstGeom prst="rect">
+            <a:avLst/>
+          </a:prstGeom>
+          <a:noFill/>
+          <a:ln/>
+        </p:spPr>
+        <p:txBody>
+          <a:bodyPr wrap="square" lIns="0" tIns="0" rIns="0" bIns="0" rtlCol="0" anchor="ctr"/>
+          <a:lstStyle/>
+          <a:p>
+            <a:pPr indent="0" marL="0">
+              <a:buNone/>
+            </a:pPr>
+            <a:r>
+              <a:rPr lang="en-US" sz="1300" b="1" dirty="0">
+                <a:solidFill>
+                  <a:srgbClr val="FFFFFF"/>
+                </a:solidFill>
+                <a:latin typeface="Cambria" pitchFamily="34" charset="0"/>
+                <a:ea typeface="Cambria" pitchFamily="34" charset="-122"/>
+                <a:cs typeface="Cambria" pitchFamily="34" charset="-120"/>
+              </a:rPr>
+              <a:t>1</a:t>
+            </a:r>
+            <a:endParaRPr lang="en-US" sz="1300" dirty="0"/>
+          </a:p>
+        </p:txBody>
+      </p:sp>
+      <p:sp>
+        <p:nvSpPr>
+          <p:cNvPr id="10" name="Shape 7"/>
+          <p:cNvSpPr/>
+          <p:nvPr/>
+        </p:nvSpPr>
+        <p:spPr>
+          <a:xfrm>
+            <a:off x="2945740" y="1691640"/>
+            <a:ext cx="1965960" cy="2880360"/>
+          </a:xfrm>
+          <a:prstGeom prst="roundRect">
+            <a:avLst>
+              <a:gd name="adj" fmla="val 5581"/>
+            </a:avLst>
+          </a:prstGeom>
+          <a:solidFill>
+            <a:srgbClr val="132A46"/>
+          </a:solidFill>
+          <a:ln/>
+        </p:spPr>
+      </p:sp>
+      <p:sp>
+        <p:nvSpPr>
+          <p:cNvPr id="11" name="Shape 8"/>
+          <p:cNvSpPr/>
+          <p:nvPr/>
+        </p:nvSpPr>
+        <p:spPr>
+          <a:xfrm>
+            <a:off x="3471520" y="2011680"/>
+            <a:ext cx="914400" cy="914400"/>
+          </a:xfrm>
+          <a:prstGeom prst="ellipse">
+            <a:avLst/>
+          </a:prstGeom>
+          <a:solidFill>
+            <a:srgbClr val="F2A93B"/>
+          </a:solidFill>
+          <a:ln/>
+        </p:spPr>
+      </p:sp>
+      <p:pic>
+        <p:nvPicPr>
+          <p:cNvPr id="12" name="Image 1" descr="preencoded.png">    </p:cNvPr>
+          <p:cNvPicPr>
+            <a:picLocks noChangeAspect="1"/>
+          </p:cNvPicPr>
+          <p:nvPr/>
+        </p:nvPicPr>
+        <p:blipFill>
+          <a:blip r:embed="rId2"/>
+          <a:stretch>
+            <a:fillRect/>
+          </a:stretch>
+        </p:blipFill>
+        <p:spPr>
+          <a:xfrm>
+            <a:off x="3677260" y="2217420"/>
+            <a:ext cx="502920" cy="502920"/>
+          </a:xfrm>
+          <a:prstGeom prst="rect">
+            <a:avLst/>
+          </a:prstGeom>
+        </p:spPr>
+      </p:pic>
+      <p:sp>
+        <p:nvSpPr>
+          <p:cNvPr id="13" name="Text 9"/>
+          <p:cNvSpPr/>
+          <p:nvPr/>
+        </p:nvSpPr>
+        <p:spPr>
+          <a:xfrm>
+            <a:off x="2945740" y="3154680"/>
+            <a:ext cx="1965960" cy="411480"/>
+          </a:xfrm>
+          <a:prstGeom prst="rect">
+            <a:avLst/>
+          </a:prstGeom>
+          <a:noFill/>
+          <a:ln/>
+        </p:spPr>
+        <p:txBody>
+          <a:bodyPr wrap="square" lIns="0" tIns="0" rIns="0" bIns="0" rtlCol="0" anchor="ctr"/>
+          <a:lstStyle/>
+          <a:p>
+            <a:pPr algn="ctr" indent="0" marL="0">
+              <a:buNone/>
+            </a:pPr>
+            <a:r>
+              <a:rPr lang="en-US" sz="1800" b="1" dirty="0">
+                <a:solidFill>
+                  <a:srgbClr val="FFFFFF"/>
+                </a:solidFill>
+                <a:latin typeface="Cambria" pitchFamily="34" charset="0"/>
+                <a:ea typeface="Cambria" pitchFamily="34" charset="-122"/>
+                <a:cs typeface="Cambria" pitchFamily="34" charset="-120"/>
+              </a:rPr>
+              <a:t>主菜</a:t>
+            </a:r>
+            <a:endParaRPr lang="en-US" sz="1800" dirty="0"/>
+          </a:p>
+        </p:txBody>
+      </p:sp>
+      <p:sp>
+        <p:nvSpPr>
+          <p:cNvPr id="14" name="Text 10"/>
+          <p:cNvSpPr/>
+          <p:nvPr/>
+        </p:nvSpPr>
+        <p:spPr>
+          <a:xfrm>
+            <a:off x="2945740" y="3657600"/>
+            <a:ext cx="1965960" cy="365760"/>
+          </a:xfrm>
+          <a:prstGeom prst="rect">
+            <a:avLst/>
+          </a:prstGeom>
+          <a:noFill/>
+          <a:ln/>
+        </p:spPr>
+        <p:txBody>
+          <a:bodyPr wrap="square" lIns="0" tIns="0" rIns="0" bIns="0" rtlCol="0" anchor="ctr"/>
+          <a:lstStyle/>
+          <a:p>
+            <a:pPr algn="ctr" indent="0" marL="0">
+              <a:buNone/>
+            </a:pPr>
+            <a:r>
+              <a:rPr lang="en-US" sz="1250" dirty="0">
+                <a:solidFill>
+                  <a:srgbClr val="C7D0DE"/>
+                </a:solidFill>
+                <a:latin typeface="Calibri" pitchFamily="34" charset="0"/>
+                <a:ea typeface="Calibri" pitchFamily="34" charset="-122"/>
+                <a:cs typeface="Calibri" pitchFamily="34" charset="-120"/>
+              </a:rPr>
+              <a:t>筋肉</a:t>
+            </a:r>
+            <a:endParaRPr lang="en-US" sz="1250" dirty="0"/>
+          </a:p>
+        </p:txBody>
+      </p:sp>
+      <p:sp>
+        <p:nvSpPr>
+          <p:cNvPr id="15" name="Text 11"/>
+          <p:cNvSpPr/>
+          <p:nvPr/>
+        </p:nvSpPr>
+        <p:spPr>
+          <a:xfrm>
+            <a:off x="3055468" y="1764792"/>
+            <a:ext cx="457200" cy="365760"/>
+          </a:xfrm>
+          <a:prstGeom prst="rect">
+            <a:avLst/>
+          </a:prstGeom>
+          <a:noFill/>
+          <a:ln/>
+        </p:spPr>
+        <p:txBody>
+          <a:bodyPr wrap="square" lIns="0" tIns="0" rIns="0" bIns="0" rtlCol="0" anchor="ctr"/>
+          <a:lstStyle/>
+          <a:p>
+            <a:pPr indent="0" marL="0">
+              <a:buNone/>
+            </a:pPr>
+            <a:r>
+              <a:rPr lang="en-US" sz="1300" b="1" dirty="0">
+                <a:solidFill>
+                  <a:srgbClr val="FFFFFF"/>
+                </a:solidFill>
+                <a:latin typeface="Cambria" pitchFamily="34" charset="0"/>
+                <a:ea typeface="Cambria" pitchFamily="34" charset="-122"/>
+                <a:cs typeface="Cambria" pitchFamily="34" charset="-120"/>
+              </a:rPr>
+              <a:t>2</a:t>
+            </a:r>
+            <a:endParaRPr lang="en-US" sz="1300" dirty="0"/>
+          </a:p>
+        </p:txBody>
+      </p:sp>
+      <p:sp>
+        <p:nvSpPr>
+          <p:cNvPr id="16" name="Shape 12"/>
+          <p:cNvSpPr/>
+          <p:nvPr/>
+        </p:nvSpPr>
+        <p:spPr>
+          <a:xfrm>
+            <a:off x="5112868" y="1691640"/>
+            <a:ext cx="1965960" cy="2880360"/>
+          </a:xfrm>
+          <a:prstGeom prst="roundRect">
+            <a:avLst>
+              <a:gd name="adj" fmla="val 5581"/>
+            </a:avLst>
+          </a:prstGeom>
+          <a:solidFill>
+            <a:srgbClr val="132A46"/>
+          </a:solidFill>
+          <a:ln/>
+        </p:spPr>
+      </p:sp>
+      <p:sp>
+        <p:nvSpPr>
+          <p:cNvPr id="17" name="Shape 13"/>
+          <p:cNvSpPr/>
+          <p:nvPr/>
+        </p:nvSpPr>
+        <p:spPr>
+          <a:xfrm>
+            <a:off x="5638648" y="2011680"/>
+            <a:ext cx="914400" cy="914400"/>
+          </a:xfrm>
+          <a:prstGeom prst="ellipse">
+            <a:avLst/>
+          </a:prstGeom>
+          <a:solidFill>
+            <a:srgbClr val="F2A93B"/>
+          </a:solidFill>
+          <a:ln/>
+        </p:spPr>
+      </p:sp>
+      <p:pic>
+        <p:nvPicPr>
+          <p:cNvPr id="18" name="Image 2" descr="preencoded.png">    </p:cNvPr>
+          <p:cNvPicPr>
+            <a:picLocks noChangeAspect="1"/>
+          </p:cNvPicPr>
+          <p:nvPr/>
+        </p:nvPicPr>
+        <p:blipFill>
+          <a:blip r:embed="rId3"/>
+          <a:stretch>
+            <a:fillRect/>
+          </a:stretch>
+        </p:blipFill>
+        <p:spPr>
+          <a:xfrm>
+            <a:off x="5844388" y="2217420"/>
+            <a:ext cx="502920" cy="502920"/>
+          </a:xfrm>
+          <a:prstGeom prst="rect">
+            <a:avLst/>
+          </a:prstGeom>
+        </p:spPr>
+      </p:pic>
+      <p:sp>
+        <p:nvSpPr>
+          <p:cNvPr id="19" name="Text 14"/>
+          <p:cNvSpPr/>
+          <p:nvPr/>
+        </p:nvSpPr>
+        <p:spPr>
+          <a:xfrm>
+            <a:off x="5112868" y="3154680"/>
+            <a:ext cx="1965960" cy="411480"/>
+          </a:xfrm>
+          <a:prstGeom prst="rect">
+            <a:avLst/>
+          </a:prstGeom>
+          <a:noFill/>
+          <a:ln/>
+        </p:spPr>
+        <p:txBody>
+          <a:bodyPr wrap="square" lIns="0" tIns="0" rIns="0" bIns="0" rtlCol="0" anchor="ctr"/>
+          <a:lstStyle/>
+          <a:p>
+            <a:pPr algn="ctr" indent="0" marL="0">
+              <a:buNone/>
+            </a:pPr>
+            <a:r>
+              <a:rPr lang="en-US" sz="1800" b="1" dirty="0">
+                <a:solidFill>
+                  <a:srgbClr val="FFFFFF"/>
+                </a:solidFill>
+                <a:latin typeface="Cambria" pitchFamily="34" charset="0"/>
+                <a:ea typeface="Cambria" pitchFamily="34" charset="-122"/>
+                <a:cs typeface="Cambria" pitchFamily="34" charset="-120"/>
+              </a:rPr>
+              <a:t>副菜</a:t>
+            </a:r>
+            <a:endParaRPr lang="en-US" sz="1800" dirty="0"/>
+          </a:p>
+        </p:txBody>
+      </p:sp>
+      <p:sp>
+        <p:nvSpPr>
+          <p:cNvPr id="20" name="Text 15"/>
+          <p:cNvSpPr/>
+          <p:nvPr/>
+        </p:nvSpPr>
+        <p:spPr>
+          <a:xfrm>
+            <a:off x="5112868" y="3657600"/>
+            <a:ext cx="1965960" cy="365760"/>
+          </a:xfrm>
+          <a:prstGeom prst="rect">
+            <a:avLst/>
+          </a:prstGeom>
+          <a:noFill/>
+          <a:ln/>
+        </p:spPr>
+        <p:txBody>
+          <a:bodyPr wrap="square" lIns="0" tIns="0" rIns="0" bIns="0" rtlCol="0" anchor="ctr"/>
+          <a:lstStyle/>
+          <a:p>
+            <a:pPr algn="ctr" indent="0" marL="0">
+              <a:buNone/>
+            </a:pPr>
+            <a:r>
+              <a:rPr lang="en-US" sz="1250" dirty="0">
+                <a:solidFill>
+                  <a:srgbClr val="C7D0DE"/>
+                </a:solidFill>
+                <a:latin typeface="Calibri" pitchFamily="34" charset="0"/>
+                <a:ea typeface="Calibri" pitchFamily="34" charset="-122"/>
+                <a:cs typeface="Calibri" pitchFamily="34" charset="-120"/>
+              </a:rPr>
+              <a:t>整える</a:t>
+            </a:r>
+            <a:endParaRPr lang="en-US" sz="1250" dirty="0"/>
+          </a:p>
+        </p:txBody>
+      </p:sp>
+      <p:sp>
+        <p:nvSpPr>
+          <p:cNvPr id="21" name="Text 16"/>
+          <p:cNvSpPr/>
+          <p:nvPr/>
+        </p:nvSpPr>
+        <p:spPr>
+          <a:xfrm>
+            <a:off x="5222596" y="1764792"/>
+            <a:ext cx="457200" cy="365760"/>
+          </a:xfrm>
+          <a:prstGeom prst="rect">
+            <a:avLst/>
+          </a:prstGeom>
+          <a:noFill/>
+          <a:ln/>
+        </p:spPr>
+        <p:txBody>
+          <a:bodyPr wrap="square" lIns="0" tIns="0" rIns="0" bIns="0" rtlCol="0" anchor="ctr"/>
+          <a:lstStyle/>
+          <a:p>
+            <a:pPr indent="0" marL="0">
+              <a:buNone/>
+            </a:pPr>
+            <a:r>
+              <a:rPr lang="en-US" sz="1300" b="1" dirty="0">
+                <a:solidFill>
+                  <a:srgbClr val="FFFFFF"/>
+                </a:solidFill>
+                <a:latin typeface="Cambria" pitchFamily="34" charset="0"/>
+                <a:ea typeface="Cambria" pitchFamily="34" charset="-122"/>
+                <a:cs typeface="Cambria" pitchFamily="34" charset="-120"/>
+              </a:rPr>
+              <a:t>3</a:t>
+            </a:r>
+            <a:endParaRPr lang="en-US" sz="1300" dirty="0"/>
+          </a:p>
+        </p:txBody>
+      </p:sp>
+      <p:sp>
+        <p:nvSpPr>
+          <p:cNvPr id="22" name="Shape 17"/>
+          <p:cNvSpPr/>
+          <p:nvPr/>
+        </p:nvSpPr>
+        <p:spPr>
+          <a:xfrm>
+            <a:off x="7279996" y="1691640"/>
+            <a:ext cx="1965960" cy="2880360"/>
+          </a:xfrm>
+          <a:prstGeom prst="roundRect">
+            <a:avLst>
+              <a:gd name="adj" fmla="val 5581"/>
+            </a:avLst>
+          </a:prstGeom>
+          <a:solidFill>
+            <a:srgbClr val="132A46"/>
+          </a:solidFill>
+          <a:ln/>
+        </p:spPr>
+      </p:sp>
+      <p:sp>
+        <p:nvSpPr>
+          <p:cNvPr id="23" name="Shape 18"/>
+          <p:cNvSpPr/>
+          <p:nvPr/>
+        </p:nvSpPr>
+        <p:spPr>
+          <a:xfrm>
+            <a:off x="7805776" y="2011680"/>
+            <a:ext cx="914400" cy="914400"/>
+          </a:xfrm>
+          <a:prstGeom prst="ellipse">
+            <a:avLst/>
+          </a:prstGeom>
+          <a:solidFill>
+            <a:srgbClr val="F2A93B"/>
+          </a:solidFill>
+          <a:ln/>
+        </p:spPr>
+      </p:sp>
+      <p:pic>
+        <p:nvPicPr>
+          <p:cNvPr id="24" name="Image 3" descr="preencoded.png">    </p:cNvPr>
+          <p:cNvPicPr>
+            <a:picLocks noChangeAspect="1"/>
+          </p:cNvPicPr>
+          <p:nvPr/>
+        </p:nvPicPr>
+        <p:blipFill>
+          <a:blip r:embed="rId4"/>
+          <a:stretch>
+            <a:fillRect/>
+          </a:stretch>
+        </p:blipFill>
+        <p:spPr>
+          <a:xfrm>
+            <a:off x="8011516" y="2217420"/>
+            <a:ext cx="502920" cy="502920"/>
+          </a:xfrm>
+          <a:prstGeom prst="rect">
+            <a:avLst/>
+          </a:prstGeom>
+        </p:spPr>
+      </p:pic>
+      <p:sp>
+        <p:nvSpPr>
+          <p:cNvPr id="25" name="Text 19"/>
+          <p:cNvSpPr/>
+          <p:nvPr/>
+        </p:nvSpPr>
+        <p:spPr>
+          <a:xfrm>
+            <a:off x="7279996" y="3154680"/>
+            <a:ext cx="1965960" cy="411480"/>
+          </a:xfrm>
+          <a:prstGeom prst="rect">
+            <a:avLst/>
+          </a:prstGeom>
+          <a:noFill/>
+          <a:ln/>
+        </p:spPr>
+        <p:txBody>
+          <a:bodyPr wrap="square" lIns="0" tIns="0" rIns="0" bIns="0" rtlCol="0" anchor="ctr"/>
+          <a:lstStyle/>
+          <a:p>
+            <a:pPr algn="ctr" indent="0" marL="0">
+              <a:buNone/>
+            </a:pPr>
+            <a:r>
+              <a:rPr lang="en-US" sz="1800" b="1" dirty="0">
+                <a:solidFill>
+                  <a:srgbClr val="FFFFFF"/>
+                </a:solidFill>
+                <a:latin typeface="Cambria" pitchFamily="34" charset="0"/>
+                <a:ea typeface="Cambria" pitchFamily="34" charset="-122"/>
+                <a:cs typeface="Cambria" pitchFamily="34" charset="-120"/>
+              </a:rPr>
+              <a:t>乳製品</a:t>
+            </a:r>
+            <a:endParaRPr lang="en-US" sz="1800" dirty="0"/>
+          </a:p>
+        </p:txBody>
+      </p:sp>
+      <p:sp>
+        <p:nvSpPr>
+          <p:cNvPr id="26" name="Text 20"/>
+          <p:cNvSpPr/>
+          <p:nvPr/>
+        </p:nvSpPr>
+        <p:spPr>
+          <a:xfrm>
+            <a:off x="7279996" y="3657600"/>
+            <a:ext cx="1965960" cy="365760"/>
+          </a:xfrm>
+          <a:prstGeom prst="rect">
+            <a:avLst/>
+          </a:prstGeom>
+          <a:noFill/>
+          <a:ln/>
+        </p:spPr>
+        <p:txBody>
+          <a:bodyPr wrap="square" lIns="0" tIns="0" rIns="0" bIns="0" rtlCol="0" anchor="ctr"/>
+          <a:lstStyle/>
+          <a:p>
+            <a:pPr algn="ctr" indent="0" marL="0">
+              <a:buNone/>
+            </a:pPr>
+            <a:r>
+              <a:rPr lang="en-US" sz="1250" dirty="0">
+                <a:solidFill>
+                  <a:srgbClr val="C7D0DE"/>
+                </a:solidFill>
+                <a:latin typeface="Calibri" pitchFamily="34" charset="0"/>
+                <a:ea typeface="Calibri" pitchFamily="34" charset="-122"/>
+                <a:cs typeface="Calibri" pitchFamily="34" charset="-120"/>
+              </a:rPr>
+              <a:t>骨</a:t>
+            </a:r>
+            <a:endParaRPr lang="en-US" sz="1250" dirty="0"/>
+          </a:p>
+        </p:txBody>
+      </p:sp>
+      <p:sp>
+        <p:nvSpPr>
+          <p:cNvPr id="27" name="Text 21"/>
+          <p:cNvSpPr/>
+          <p:nvPr/>
+        </p:nvSpPr>
+        <p:spPr>
+          <a:xfrm>
+            <a:off x="7389724" y="1764792"/>
+            <a:ext cx="457200" cy="365760"/>
+          </a:xfrm>
+          <a:prstGeom prst="rect">
+            <a:avLst/>
+          </a:prstGeom>
+          <a:noFill/>
+          <a:ln/>
+        </p:spPr>
+        <p:txBody>
+          <a:bodyPr wrap="square" lIns="0" tIns="0" rIns="0" bIns="0" rtlCol="0" anchor="ctr"/>
+          <a:lstStyle/>
+          <a:p>
+            <a:pPr indent="0" marL="0">
+              <a:buNone/>
+            </a:pPr>
+            <a:r>
+              <a:rPr lang="en-US" sz="1300" b="1" dirty="0">
+                <a:solidFill>
+                  <a:srgbClr val="FFFFFF"/>
+                </a:solidFill>
+                <a:latin typeface="Cambria" pitchFamily="34" charset="0"/>
+                <a:ea typeface="Cambria" pitchFamily="34" charset="-122"/>
+                <a:cs typeface="Cambria" pitchFamily="34" charset="-120"/>
+              </a:rPr>
+              <a:t>4</a:t>
+            </a:r>
+            <a:endParaRPr lang="en-US" sz="1300" dirty="0"/>
+          </a:p>
+        </p:txBody>
+      </p:sp>
+      <p:sp>
+        <p:nvSpPr>
+          <p:cNvPr id="28" name="Shape 22"/>
+          <p:cNvSpPr/>
+          <p:nvPr/>
+        </p:nvSpPr>
+        <p:spPr>
+          <a:xfrm>
+            <a:off x="9447124" y="1691640"/>
+            <a:ext cx="1965960" cy="2880360"/>
+          </a:xfrm>
+          <a:prstGeom prst="roundRect">
+            <a:avLst>
+              <a:gd name="adj" fmla="val 5581"/>
+            </a:avLst>
+          </a:prstGeom>
+          <a:solidFill>
+            <a:srgbClr val="F2A93B"/>
+          </a:solidFill>
+          <a:ln/>
+        </p:spPr>
+      </p:sp>
+      <p:sp>
+        <p:nvSpPr>
+          <p:cNvPr id="29" name="Shape 23"/>
+          <p:cNvSpPr/>
+          <p:nvPr/>
+        </p:nvSpPr>
+        <p:spPr>
+          <a:xfrm>
+            <a:off x="9972904" y="2011680"/>
+            <a:ext cx="914400" cy="914400"/>
+          </a:xfrm>
+          <a:prstGeom prst="ellipse">
+            <a:avLst/>
+          </a:prstGeom>
+          <a:solidFill>
+            <a:srgbClr val="FFFFFF"/>
+          </a:solidFill>
+          <a:ln/>
+        </p:spPr>
+      </p:sp>
+      <p:pic>
+        <p:nvPicPr>
+          <p:cNvPr id="30" name="Image 4" descr="preencoded.png">    </p:cNvPr>
+          <p:cNvPicPr>
+            <a:picLocks noChangeAspect="1"/>
+          </p:cNvPicPr>
+          <p:nvPr/>
+        </p:nvPicPr>
+        <p:blipFill>
+          <a:blip r:embed="rId5"/>
+          <a:stretch>
+            <a:fillRect/>
+          </a:stretch>
+        </p:blipFill>
+        <p:spPr>
+          <a:xfrm>
+            <a:off x="10178644" y="2217420"/>
+            <a:ext cx="502920" cy="502920"/>
+          </a:xfrm>
+          <a:prstGeom prst="rect">
+            <a:avLst/>
+          </a:prstGeom>
+        </p:spPr>
+      </p:pic>
+      <p:sp>
+        <p:nvSpPr>
+          <p:cNvPr id="31" name="Text 24"/>
+          <p:cNvSpPr/>
+          <p:nvPr/>
+        </p:nvSpPr>
+        <p:spPr>
+          <a:xfrm>
+            <a:off x="9447124" y="3154680"/>
+            <a:ext cx="1965960" cy="411480"/>
+          </a:xfrm>
+          <a:prstGeom prst="rect">
+            <a:avLst/>
+          </a:prstGeom>
+          <a:noFill/>
+          <a:ln/>
+        </p:spPr>
+        <p:txBody>
+          <a:bodyPr wrap="square" lIns="0" tIns="0" rIns="0" bIns="0" rtlCol="0" anchor="ctr"/>
+          <a:lstStyle/>
+          <a:p>
+            <a:pPr algn="ctr" indent="0" marL="0">
+              <a:buNone/>
+            </a:pPr>
+            <a:r>
+              <a:rPr lang="en-US" sz="1800" b="1" dirty="0">
+                <a:solidFill>
+                  <a:srgbClr val="FFFFFF"/>
+                </a:solidFill>
+                <a:latin typeface="Cambria" pitchFamily="34" charset="0"/>
+                <a:ea typeface="Cambria" pitchFamily="34" charset="-122"/>
+                <a:cs typeface="Cambria" pitchFamily="34" charset="-120"/>
+              </a:rPr>
+              <a:t>果物</a:t>
+            </a:r>
+            <a:endParaRPr lang="en-US" sz="1800" dirty="0"/>
+          </a:p>
+        </p:txBody>
+      </p:sp>
+      <p:sp>
+        <p:nvSpPr>
+          <p:cNvPr id="32" name="Text 25"/>
+          <p:cNvSpPr/>
+          <p:nvPr/>
+        </p:nvSpPr>
+        <p:spPr>
+          <a:xfrm>
+            <a:off x="9447124" y="3657600"/>
+            <a:ext cx="1965960" cy="365760"/>
+          </a:xfrm>
+          <a:prstGeom prst="rect">
+            <a:avLst/>
+          </a:prstGeom>
+          <a:noFill/>
+          <a:ln/>
+        </p:spPr>
+        <p:txBody>
+          <a:bodyPr wrap="square" lIns="0" tIns="0" rIns="0" bIns="0" rtlCol="0" anchor="ctr"/>
+          <a:lstStyle/>
+          <a:p>
+            <a:pPr algn="ctr" indent="0" marL="0">
+              <a:buNone/>
+            </a:pPr>
+            <a:r>
+              <a:rPr lang="en-US" sz="1250" dirty="0">
+                <a:solidFill>
+                  <a:srgbClr val="0D1F35"/>
+                </a:solidFill>
+                <a:latin typeface="Calibri" pitchFamily="34" charset="0"/>
+                <a:ea typeface="Calibri" pitchFamily="34" charset="-122"/>
+                <a:cs typeface="Calibri" pitchFamily="34" charset="-120"/>
+              </a:rPr>
+              <a:t>回復・補給</a:t>
+            </a:r>
+            <a:endParaRPr lang="en-US" sz="1250" dirty="0"/>
+          </a:p>
+        </p:txBody>
+      </p:sp>
+      <p:sp>
+        <p:nvSpPr>
+          <p:cNvPr id="33" name="Text 26"/>
+          <p:cNvSpPr/>
+          <p:nvPr/>
+        </p:nvSpPr>
+        <p:spPr>
+          <a:xfrm>
+            <a:off x="9556852" y="1764792"/>
+            <a:ext cx="457200" cy="365760"/>
+          </a:xfrm>
+          <a:prstGeom prst="rect">
+            <a:avLst/>
+          </a:prstGeom>
+          <a:noFill/>
+          <a:ln/>
+        </p:spPr>
+        <p:txBody>
+          <a:bodyPr wrap="square" lIns="0" tIns="0" rIns="0" bIns="0" rtlCol="0" anchor="ctr"/>
+          <a:lstStyle/>
+          <a:p>
+            <a:pPr indent="0" marL="0">
+              <a:buNone/>
+            </a:pPr>
+            <a:r>
+              <a:rPr lang="en-US" sz="1300" b="1" dirty="0">
+                <a:solidFill>
+                  <a:srgbClr val="0D1F35"/>
+                </a:solidFill>
+                <a:latin typeface="Cambria" pitchFamily="34" charset="0"/>
+                <a:ea typeface="Cambria" pitchFamily="34" charset="-122"/>
+                <a:cs typeface="Cambria" pitchFamily="34" charset="-120"/>
+              </a:rPr>
+              <a:t>5</a:t>
+            </a:r>
+            <a:endParaRPr lang="en-US" sz="1300" dirty="0"/>
+          </a:p>
+        </p:txBody>
+      </p:sp>
+      <p:sp>
+        <p:nvSpPr>
+          <p:cNvPr id="34" name="Shape 27"/>
+          <p:cNvSpPr/>
+          <p:nvPr/>
+        </p:nvSpPr>
+        <p:spPr>
+          <a:xfrm>
+            <a:off x="731520" y="4892040"/>
+            <a:ext cx="10725912" cy="1234440"/>
+          </a:xfrm>
+          <a:prstGeom prst="roundRect">
+            <a:avLst>
+              <a:gd name="adj" fmla="val 8889"/>
+            </a:avLst>
+          </a:prstGeom>
+          <a:solidFill>
+            <a:srgbClr val="F7F8FA"/>
+          </a:solidFill>
+          <a:ln w="12700">
+            <a:solidFill>
+              <a:srgbClr val="E4E7EC"/>
+            </a:solidFill>
+            <a:prstDash val="solid"/>
+          </a:ln>
+        </p:spPr>
+      </p:sp>
+      <p:sp>
+        <p:nvSpPr>
+          <p:cNvPr id="35" name="Text 28"/>
+          <p:cNvSpPr/>
+          <p:nvPr/>
+        </p:nvSpPr>
+        <p:spPr>
+          <a:xfrm>
+            <a:off x="1005840" y="5020056"/>
+            <a:ext cx="4572000" cy="365760"/>
+          </a:xfrm>
+          <a:prstGeom prst="rect">
+            <a:avLst/>
+          </a:prstGeom>
+          <a:noFill/>
+          <a:ln/>
+        </p:spPr>
+        <p:txBody>
+          <a:bodyPr wrap="square" lIns="0" tIns="0" rIns="0" bIns="0" rtlCol="0" anchor="ctr"/>
+          <a:lstStyle/>
+          <a:p>
+            <a:pPr indent="0" marL="0">
+              <a:buNone/>
+            </a:pPr>
+            <a:r>
+              <a:rPr lang="en-US" sz="1450" b="1" dirty="0">
+                <a:solidFill>
+                  <a:srgbClr val="E08A1E"/>
+                </a:solidFill>
+                <a:latin typeface="Cambria" pitchFamily="34" charset="0"/>
+                <a:ea typeface="Cambria" pitchFamily="34" charset="-122"/>
+                <a:cs typeface="Cambria" pitchFamily="34" charset="-120"/>
+              </a:rPr>
+              <a:t>トップ選手も基本は同じ</a:t>
+            </a:r>
+            <a:endParaRPr lang="en-US" sz="1450" dirty="0"/>
+          </a:p>
+        </p:txBody>
+      </p:sp>
+      <p:sp>
+        <p:nvSpPr>
+          <p:cNvPr id="36" name="Text 29"/>
+          <p:cNvSpPr/>
+          <p:nvPr/>
+        </p:nvSpPr>
+        <p:spPr>
+          <a:xfrm>
+            <a:off x="1005840" y="5394960"/>
+            <a:ext cx="10149840" cy="640080"/>
+          </a:xfrm>
+          <a:prstGeom prst="rect">
+            <a:avLst/>
+          </a:prstGeom>
+          <a:noFill/>
+          <a:ln/>
+        </p:spPr>
+        <p:txBody>
+          <a:bodyPr wrap="square" lIns="0" tIns="0" rIns="0" bIns="0" rtlCol="0" anchor="ctr"/>
+          <a:lstStyle/>
+          <a:p>
+            <a:pPr indent="0" marL="0">
+              <a:lnSpc>
+                <a:spcPts val="1900"/>
+              </a:lnSpc>
+              <a:buNone/>
+            </a:pPr>
+            <a:r>
+              <a:rPr lang="en-US" sz="1250" dirty="0">
+                <a:solidFill>
+                  <a:srgbClr val="1A2233"/>
+                </a:solidFill>
+                <a:latin typeface="Calibri" pitchFamily="34" charset="0"/>
+                <a:ea typeface="Calibri" pitchFamily="34" charset="-122"/>
+                <a:cs typeface="Calibri" pitchFamily="34" charset="-120"/>
+              </a:rPr>
+              <a:t>アスリートの特別な食事も、ベースはこの5つ。これが崩れると「練習しているのに筋肉がつかない」「大事な時期に体調を崩す」といった問題が起こります。</a:t>
+            </a:r>
+            <a:endParaRPr lang="en-US" sz="1250" dirty="0"/>
+          </a:p>
+        </p:txBody>
+      </p:sp>
+      <p:sp>
+        <p:nvSpPr>
+          <p:cNvPr id="37" name="Text 30"/>
+          <p:cNvSpPr/>
+          <p:nvPr/>
+        </p:nvSpPr>
+        <p:spPr>
+          <a:xfrm>
+            <a:off x="457200" y="6473952"/>
+            <a:ext cx="7315200" cy="274320"/>
+          </a:xfrm>
+          <a:prstGeom prst="rect">
+            <a:avLst/>
+          </a:prstGeom>
+          <a:noFill/>
+          <a:ln/>
+        </p:spPr>
+        <p:txBody>
+          <a:bodyPr wrap="square" lIns="0" tIns="0" rIns="0" bIns="0" rtlCol="0" anchor="ctr"/>
+          <a:lstStyle/>
+          <a:p>
+            <a:pPr algn="l" indent="0" marL="0">
+              <a:buNone/>
+            </a:pPr>
+            <a:r>
+              <a:rPr lang="en-US" sz="900" dirty="0">
+                <a:solidFill>
+                  <a:srgbClr val="5B6472"/>
+                </a:solidFill>
+                <a:latin typeface="Calibri" pitchFamily="34" charset="0"/>
+                <a:ea typeface="Calibri" pitchFamily="34" charset="-122"/>
+                <a:cs typeface="Calibri" pitchFamily="34" charset="-120"/>
+              </a:rPr>
+              <a:t>スポーツ管理栄養士講義 ｜ 協力：スミフルジャパン</a:t>
+            </a:r>
+            <a:endParaRPr lang="en-US" sz="900" dirty="0"/>
+          </a:p>
+        </p:txBody>
+      </p:sp>
+      <p:sp>
+        <p:nvSpPr>
+          <p:cNvPr id="38" name="Text 31"/>
+          <p:cNvSpPr/>
+          <p:nvPr/>
+        </p:nvSpPr>
+        <p:spPr>
+          <a:xfrm>
+            <a:off x="11277295" y="6473952"/>
+            <a:ext cx="548640" cy="274320"/>
+          </a:xfrm>
+          <a:prstGeom prst="rect">
+            <a:avLst/>
+          </a:prstGeom>
+          <a:noFill/>
+          <a:ln/>
+        </p:spPr>
+        <p:txBody>
+          <a:bodyPr wrap="square" lIns="0" tIns="0" rIns="0" bIns="0" rtlCol="0" anchor="ctr"/>
+          <a:lstStyle/>
+          <a:p>
+            <a:pPr algn="r" indent="0" marL="0">
+              <a:buNone/>
+            </a:pPr>
+            <a:r>
+              <a:rPr lang="en-US" sz="900" dirty="0">
+                <a:solidFill>
+                  <a:srgbClr val="5B6472"/>
+                </a:solidFill>
+                <a:latin typeface="Calibri" pitchFamily="34" charset="0"/>
+                <a:ea typeface="Calibri" pitchFamily="34" charset="-122"/>
+                <a:cs typeface="Calibri" pitchFamily="34" charset="-120"/>
+              </a:rPr>
+              <a:t>10</a:t>
+            </a:r>
+            <a:endParaRPr lang="en-US" sz="900" dirty="0"/>
+          </a:p>
+        </p:txBody>
+      </p:sp>
+    </p:spTree>
+  </p:cSld>
+  <p:clrMapOvr>
+    <a:masterClrMapping/>
+  </p:clrMapOvr>
+</p:sld>
+</file>
+
+<file path=ppt/slides/slide11.xml><?xml version="1.0" encoding="utf-8"?>
+<p:sld xmlns:a="http://schemas.openxmlformats.org/drawingml/2006/main" xmlns:r="http://schemas.openxmlformats.org/officeDocument/2006/relationships" xmlns:p="http://schemas.openxmlformats.org/presentationml/2006/main">
+  <p:cSld name="Slide 11">
+    <p:bg>
+      <p:bgPr>
+        <a:solidFill>
           <a:srgbClr val="132A46"/>
         </a:solidFill>
       </p:bgPr>
@@ -2481,9 +3781,9 @@
 </p:sld>
 </file>
 
-<file path=ppt/slides/slide11.xml><?xml version="1.0" encoding="utf-8"?>
+<file path=ppt/slides/slide12.xml><?xml version="1.0" encoding="utf-8"?>
 <p:sld xmlns:a="http://schemas.openxmlformats.org/drawingml/2006/main" xmlns:r="http://schemas.openxmlformats.org/officeDocument/2006/relationships" xmlns:p="http://schemas.openxmlformats.org/presentationml/2006/main">
-  <p:cSld name="Slide 11">
+  <p:cSld name="Slide 12">
     <p:bg>
       <p:bgPr>
         <a:solidFill>
@@ -3096,7 +4396,7 @@
                 <a:ea typeface="Calibri" pitchFamily="34" charset="-122"/>
                 <a:cs typeface="Calibri" pitchFamily="34" charset="-120"/>
               </a:rPr>
-              <a:t>11</a:t>
+              <a:t>12</a:t>
             </a:r>
             <a:endParaRPr lang="en-US" sz="900" dirty="0"/>
           </a:p>
@@ -3110,9 +4410,9 @@
 </p:sld>
 </file>
 
-<file path=ppt/slides/slide12.xml><?xml version="1.0" encoding="utf-8"?>
+<file path=ppt/slides/slide13.xml><?xml version="1.0" encoding="utf-8"?>
 <p:sld xmlns:a="http://schemas.openxmlformats.org/drawingml/2006/main" xmlns:r="http://schemas.openxmlformats.org/officeDocument/2006/relationships" xmlns:p="http://schemas.openxmlformats.org/presentationml/2006/main">
-  <p:cSld name="Slide 12">
+  <p:cSld name="Slide 13">
     <p:bg>
       <p:bgPr>
         <a:solidFill>
@@ -5570,6 +6870,1329 @@
     <p:bg>
       <p:bgPr>
         <a:solidFill>
+          <a:srgbClr val="FFFFFF"/>
+        </a:solidFill>
+      </p:bgPr>
+    </p:bg>
+    <p:spTree>
+      <p:nvGrpSpPr>
+        <p:cNvPr id="1" name=""/>
+        <p:cNvGrpSpPr/>
+        <p:nvPr/>
+      </p:nvGrpSpPr>
+      <p:grpSpPr>
+        <a:xfrm>
+          <a:off x="0" y="0"/>
+          <a:ext cx="0" cy="0"/>
+          <a:chOff x="0" y="0"/>
+          <a:chExt cx="0" cy="0"/>
+        </a:xfrm>
+      </p:grpSpPr>
+      <p:sp>
+        <p:nvSpPr>
+          <p:cNvPr id="2" name="Text 0"/>
+          <p:cNvSpPr/>
+          <p:nvPr/>
+        </p:nvSpPr>
+        <p:spPr>
+          <a:xfrm>
+            <a:off x="731520" y="457200"/>
+            <a:ext cx="10698480" cy="502920"/>
+          </a:xfrm>
+          <a:prstGeom prst="rect">
+            <a:avLst/>
+          </a:prstGeom>
+          <a:noFill/>
+          <a:ln/>
+        </p:spPr>
+        <p:txBody>
+          <a:bodyPr wrap="square" lIns="0" tIns="0" rIns="0" bIns="0" rtlCol="0" anchor="ctr"/>
+          <a:lstStyle/>
+          <a:p>
+            <a:pPr indent="0" marL="0">
+              <a:buNone/>
+            </a:pPr>
+            <a:r>
+              <a:rPr lang="en-US" sz="2600" b="1" dirty="0">
+                <a:solidFill>
+                  <a:srgbClr val="132A46"/>
+                </a:solidFill>
+                <a:latin typeface="Cambria" pitchFamily="34" charset="0"/>
+                <a:ea typeface="Cambria" pitchFamily="34" charset="-122"/>
+                <a:cs typeface="Cambria" pitchFamily="34" charset="-120"/>
+              </a:rPr>
+              <a:t>やりがいが大きい分、大変なことも…</a:t>
+            </a:r>
+            <a:endParaRPr lang="en-US" sz="2600" dirty="0"/>
+          </a:p>
+        </p:txBody>
+      </p:sp>
+      <p:sp>
+        <p:nvSpPr>
+          <p:cNvPr id="3" name="Text 1"/>
+          <p:cNvSpPr/>
+          <p:nvPr/>
+        </p:nvSpPr>
+        <p:spPr>
+          <a:xfrm>
+            <a:off x="731520" y="960120"/>
+            <a:ext cx="10698480" cy="365760"/>
+          </a:xfrm>
+          <a:prstGeom prst="rect">
+            <a:avLst/>
+          </a:prstGeom>
+          <a:noFill/>
+          <a:ln/>
+        </p:spPr>
+        <p:txBody>
+          <a:bodyPr wrap="square" lIns="0" tIns="0" rIns="0" bIns="0" rtlCol="0" anchor="ctr"/>
+          <a:lstStyle/>
+          <a:p>
+            <a:pPr indent="0" marL="0">
+              <a:buNone/>
+            </a:pPr>
+            <a:r>
+              <a:rPr lang="en-US" sz="1300" dirty="0">
+                <a:solidFill>
+                  <a:srgbClr val="5B6472"/>
+                </a:solidFill>
+                <a:latin typeface="Calibri" pitchFamily="34" charset="0"/>
+                <a:ea typeface="Calibri" pitchFamily="34" charset="-122"/>
+                <a:cs typeface="Calibri" pitchFamily="34" charset="-120"/>
+              </a:rPr>
+              <a:t>アスリートと本気で向き合うからこそ見えてくる、5つのハードル</a:t>
+            </a:r>
+            <a:endParaRPr lang="en-US" sz="1300" dirty="0"/>
+          </a:p>
+        </p:txBody>
+      </p:sp>
+      <p:sp>
+        <p:nvSpPr>
+          <p:cNvPr id="4" name="Shape 2"/>
+          <p:cNvSpPr/>
+          <p:nvPr/>
+        </p:nvSpPr>
+        <p:spPr>
+          <a:xfrm>
+            <a:off x="731520" y="5257800"/>
+            <a:ext cx="603504" cy="914400"/>
+          </a:xfrm>
+          <a:prstGeom prst="rect">
+            <a:avLst/>
+          </a:prstGeom>
+          <a:solidFill>
+            <a:srgbClr val="132A46"/>
+          </a:solidFill>
+          <a:ln/>
+        </p:spPr>
+      </p:sp>
+      <p:sp>
+        <p:nvSpPr>
+          <p:cNvPr id="5" name="Shape 3"/>
+          <p:cNvSpPr/>
+          <p:nvPr/>
+        </p:nvSpPr>
+        <p:spPr>
+          <a:xfrm>
+            <a:off x="731520" y="5257800"/>
+            <a:ext cx="603504" cy="45720"/>
+          </a:xfrm>
+          <a:prstGeom prst="rect">
+            <a:avLst/>
+          </a:prstGeom>
+          <a:solidFill>
+            <a:srgbClr val="F2A93B"/>
+          </a:solidFill>
+          <a:ln/>
+        </p:spPr>
+      </p:sp>
+      <p:sp>
+        <p:nvSpPr>
+          <p:cNvPr id="6" name="Text 4"/>
+          <p:cNvSpPr/>
+          <p:nvPr/>
+        </p:nvSpPr>
+        <p:spPr>
+          <a:xfrm>
+            <a:off x="731520" y="5367528"/>
+            <a:ext cx="603504" cy="365760"/>
+          </a:xfrm>
+          <a:prstGeom prst="rect">
+            <a:avLst/>
+          </a:prstGeom>
+          <a:noFill/>
+          <a:ln/>
+        </p:spPr>
+        <p:txBody>
+          <a:bodyPr wrap="square" lIns="0" tIns="0" rIns="0" bIns="0" rtlCol="0" anchor="ctr"/>
+          <a:lstStyle/>
+          <a:p>
+            <a:pPr algn="ctr" indent="0" marL="0">
+              <a:buNone/>
+            </a:pPr>
+            <a:r>
+              <a:rPr lang="en-US" sz="1700" b="1" dirty="0">
+                <a:solidFill>
+                  <a:srgbClr val="FFFFFF"/>
+                </a:solidFill>
+                <a:latin typeface="Cambria" pitchFamily="34" charset="0"/>
+                <a:ea typeface="Cambria" pitchFamily="34" charset="-122"/>
+                <a:cs typeface="Cambria" pitchFamily="34" charset="-120"/>
+              </a:rPr>
+              <a:t>1</a:t>
+            </a:r>
+            <a:endParaRPr lang="en-US" sz="1700" dirty="0"/>
+          </a:p>
+        </p:txBody>
+      </p:sp>
+      <p:sp>
+        <p:nvSpPr>
+          <p:cNvPr id="7" name="Shape 5"/>
+          <p:cNvSpPr/>
+          <p:nvPr/>
+        </p:nvSpPr>
+        <p:spPr>
+          <a:xfrm>
+            <a:off x="1444752" y="4663440"/>
+            <a:ext cx="603504" cy="1508760"/>
+          </a:xfrm>
+          <a:prstGeom prst="rect">
+            <a:avLst/>
+          </a:prstGeom>
+          <a:solidFill>
+            <a:srgbClr val="4B4A43"/>
+          </a:solidFill>
+          <a:ln/>
+        </p:spPr>
+      </p:sp>
+      <p:sp>
+        <p:nvSpPr>
+          <p:cNvPr id="8" name="Shape 6"/>
+          <p:cNvSpPr/>
+          <p:nvPr/>
+        </p:nvSpPr>
+        <p:spPr>
+          <a:xfrm>
+            <a:off x="1444752" y="4663440"/>
+            <a:ext cx="603504" cy="45720"/>
+          </a:xfrm>
+          <a:prstGeom prst="rect">
+            <a:avLst/>
+          </a:prstGeom>
+          <a:solidFill>
+            <a:srgbClr val="F2A93B"/>
+          </a:solidFill>
+          <a:ln/>
+        </p:spPr>
+      </p:sp>
+      <p:sp>
+        <p:nvSpPr>
+          <p:cNvPr id="9" name="Text 7"/>
+          <p:cNvSpPr/>
+          <p:nvPr/>
+        </p:nvSpPr>
+        <p:spPr>
+          <a:xfrm>
+            <a:off x="1444752" y="4773168"/>
+            <a:ext cx="603504" cy="365760"/>
+          </a:xfrm>
+          <a:prstGeom prst="rect">
+            <a:avLst/>
+          </a:prstGeom>
+          <a:noFill/>
+          <a:ln/>
+        </p:spPr>
+        <p:txBody>
+          <a:bodyPr wrap="square" lIns="0" tIns="0" rIns="0" bIns="0" rtlCol="0" anchor="ctr"/>
+          <a:lstStyle/>
+          <a:p>
+            <a:pPr algn="ctr" indent="0" marL="0">
+              <a:buNone/>
+            </a:pPr>
+            <a:r>
+              <a:rPr lang="en-US" sz="1700" b="1" dirty="0">
+                <a:solidFill>
+                  <a:srgbClr val="FFFFFF"/>
+                </a:solidFill>
+                <a:latin typeface="Cambria" pitchFamily="34" charset="0"/>
+                <a:ea typeface="Cambria" pitchFamily="34" charset="-122"/>
+                <a:cs typeface="Cambria" pitchFamily="34" charset="-120"/>
+              </a:rPr>
+              <a:t>2</a:t>
+            </a:r>
+            <a:endParaRPr lang="en-US" sz="1700" dirty="0"/>
+          </a:p>
+        </p:txBody>
+      </p:sp>
+      <p:sp>
+        <p:nvSpPr>
+          <p:cNvPr id="10" name="Shape 8"/>
+          <p:cNvSpPr/>
+          <p:nvPr/>
+        </p:nvSpPr>
+        <p:spPr>
+          <a:xfrm>
+            <a:off x="2157984" y="4069080"/>
+            <a:ext cx="603504" cy="2103120"/>
+          </a:xfrm>
+          <a:prstGeom prst="rect">
+            <a:avLst/>
+          </a:prstGeom>
+          <a:solidFill>
+            <a:srgbClr val="836A41"/>
+          </a:solidFill>
+          <a:ln/>
+        </p:spPr>
+      </p:sp>
+      <p:sp>
+        <p:nvSpPr>
+          <p:cNvPr id="11" name="Shape 9"/>
+          <p:cNvSpPr/>
+          <p:nvPr/>
+        </p:nvSpPr>
+        <p:spPr>
+          <a:xfrm>
+            <a:off x="2157984" y="4069080"/>
+            <a:ext cx="603504" cy="45720"/>
+          </a:xfrm>
+          <a:prstGeom prst="rect">
+            <a:avLst/>
+          </a:prstGeom>
+          <a:solidFill>
+            <a:srgbClr val="F2A93B"/>
+          </a:solidFill>
+          <a:ln/>
+        </p:spPr>
+      </p:sp>
+      <p:sp>
+        <p:nvSpPr>
+          <p:cNvPr id="12" name="Text 10"/>
+          <p:cNvSpPr/>
+          <p:nvPr/>
+        </p:nvSpPr>
+        <p:spPr>
+          <a:xfrm>
+            <a:off x="2157984" y="4178808"/>
+            <a:ext cx="603504" cy="365760"/>
+          </a:xfrm>
+          <a:prstGeom prst="rect">
+            <a:avLst/>
+          </a:prstGeom>
+          <a:noFill/>
+          <a:ln/>
+        </p:spPr>
+        <p:txBody>
+          <a:bodyPr wrap="square" lIns="0" tIns="0" rIns="0" bIns="0" rtlCol="0" anchor="ctr"/>
+          <a:lstStyle/>
+          <a:p>
+            <a:pPr algn="ctr" indent="0" marL="0">
+              <a:buNone/>
+            </a:pPr>
+            <a:r>
+              <a:rPr lang="en-US" sz="1700" b="1" dirty="0">
+                <a:solidFill>
+                  <a:srgbClr val="FFFFFF"/>
+                </a:solidFill>
+                <a:latin typeface="Cambria" pitchFamily="34" charset="0"/>
+                <a:ea typeface="Cambria" pitchFamily="34" charset="-122"/>
+                <a:cs typeface="Cambria" pitchFamily="34" charset="-120"/>
+              </a:rPr>
+              <a:t>3</a:t>
+            </a:r>
+            <a:endParaRPr lang="en-US" sz="1700" dirty="0"/>
+          </a:p>
+        </p:txBody>
+      </p:sp>
+      <p:sp>
+        <p:nvSpPr>
+          <p:cNvPr id="13" name="Shape 11"/>
+          <p:cNvSpPr/>
+          <p:nvPr/>
+        </p:nvSpPr>
+        <p:spPr>
+          <a:xfrm>
+            <a:off x="2871216" y="3474720"/>
+            <a:ext cx="603504" cy="2697480"/>
+          </a:xfrm>
+          <a:prstGeom prst="rect">
+            <a:avLst/>
+          </a:prstGeom>
+          <a:solidFill>
+            <a:srgbClr val="BA893E"/>
+          </a:solidFill>
+          <a:ln/>
+        </p:spPr>
+      </p:sp>
+      <p:sp>
+        <p:nvSpPr>
+          <p:cNvPr id="14" name="Shape 12"/>
+          <p:cNvSpPr/>
+          <p:nvPr/>
+        </p:nvSpPr>
+        <p:spPr>
+          <a:xfrm>
+            <a:off x="2871216" y="3474720"/>
+            <a:ext cx="603504" cy="45720"/>
+          </a:xfrm>
+          <a:prstGeom prst="rect">
+            <a:avLst/>
+          </a:prstGeom>
+          <a:solidFill>
+            <a:srgbClr val="F2A93B"/>
+          </a:solidFill>
+          <a:ln/>
+        </p:spPr>
+      </p:sp>
+      <p:sp>
+        <p:nvSpPr>
+          <p:cNvPr id="15" name="Text 13"/>
+          <p:cNvSpPr/>
+          <p:nvPr/>
+        </p:nvSpPr>
+        <p:spPr>
+          <a:xfrm>
+            <a:off x="2871216" y="3584448"/>
+            <a:ext cx="603504" cy="365760"/>
+          </a:xfrm>
+          <a:prstGeom prst="rect">
+            <a:avLst/>
+          </a:prstGeom>
+          <a:noFill/>
+          <a:ln/>
+        </p:spPr>
+        <p:txBody>
+          <a:bodyPr wrap="square" lIns="0" tIns="0" rIns="0" bIns="0" rtlCol="0" anchor="ctr"/>
+          <a:lstStyle/>
+          <a:p>
+            <a:pPr algn="ctr" indent="0" marL="0">
+              <a:buNone/>
+            </a:pPr>
+            <a:r>
+              <a:rPr lang="en-US" sz="1700" b="1" dirty="0">
+                <a:solidFill>
+                  <a:srgbClr val="0D1F35"/>
+                </a:solidFill>
+                <a:latin typeface="Cambria" pitchFamily="34" charset="0"/>
+                <a:ea typeface="Cambria" pitchFamily="34" charset="-122"/>
+                <a:cs typeface="Cambria" pitchFamily="34" charset="-120"/>
+              </a:rPr>
+              <a:t>4</a:t>
+            </a:r>
+            <a:endParaRPr lang="en-US" sz="1700" dirty="0"/>
+          </a:p>
+        </p:txBody>
+      </p:sp>
+      <p:sp>
+        <p:nvSpPr>
+          <p:cNvPr id="16" name="Shape 14"/>
+          <p:cNvSpPr/>
+          <p:nvPr/>
+        </p:nvSpPr>
+        <p:spPr>
+          <a:xfrm>
+            <a:off x="3584448" y="2880360"/>
+            <a:ext cx="603504" cy="3291840"/>
+          </a:xfrm>
+          <a:prstGeom prst="rect">
+            <a:avLst/>
+          </a:prstGeom>
+          <a:solidFill>
+            <a:srgbClr val="F2A93B"/>
+          </a:solidFill>
+          <a:ln/>
+        </p:spPr>
+      </p:sp>
+      <p:sp>
+        <p:nvSpPr>
+          <p:cNvPr id="17" name="Shape 15"/>
+          <p:cNvSpPr/>
+          <p:nvPr/>
+        </p:nvSpPr>
+        <p:spPr>
+          <a:xfrm>
+            <a:off x="3584448" y="2880360"/>
+            <a:ext cx="603504" cy="45720"/>
+          </a:xfrm>
+          <a:prstGeom prst="rect">
+            <a:avLst/>
+          </a:prstGeom>
+          <a:solidFill>
+            <a:srgbClr val="F2A93B"/>
+          </a:solidFill>
+          <a:ln/>
+        </p:spPr>
+      </p:sp>
+      <p:sp>
+        <p:nvSpPr>
+          <p:cNvPr id="18" name="Text 16"/>
+          <p:cNvSpPr/>
+          <p:nvPr/>
+        </p:nvSpPr>
+        <p:spPr>
+          <a:xfrm>
+            <a:off x="3584448" y="2990088"/>
+            <a:ext cx="603504" cy="365760"/>
+          </a:xfrm>
+          <a:prstGeom prst="rect">
+            <a:avLst/>
+          </a:prstGeom>
+          <a:noFill/>
+          <a:ln/>
+        </p:spPr>
+        <p:txBody>
+          <a:bodyPr wrap="square" lIns="0" tIns="0" rIns="0" bIns="0" rtlCol="0" anchor="ctr"/>
+          <a:lstStyle/>
+          <a:p>
+            <a:pPr algn="ctr" indent="0" marL="0">
+              <a:buNone/>
+            </a:pPr>
+            <a:r>
+              <a:rPr lang="en-US" sz="1700" b="1" dirty="0">
+                <a:solidFill>
+                  <a:srgbClr val="0D1F35"/>
+                </a:solidFill>
+                <a:latin typeface="Cambria" pitchFamily="34" charset="0"/>
+                <a:ea typeface="Cambria" pitchFamily="34" charset="-122"/>
+                <a:cs typeface="Cambria" pitchFamily="34" charset="-120"/>
+              </a:rPr>
+              <a:t>5</a:t>
+            </a:r>
+            <a:endParaRPr lang="en-US" sz="1700" dirty="0"/>
+          </a:p>
+        </p:txBody>
+      </p:sp>
+      <p:pic>
+        <p:nvPicPr>
+          <p:cNvPr id="19" name="Image 0" descr="preencoded.png">    </p:cNvPr>
+          <p:cNvPicPr>
+            <a:picLocks noChangeAspect="1"/>
+          </p:cNvPicPr>
+          <p:nvPr/>
+        </p:nvPicPr>
+        <p:blipFill>
+          <a:blip r:embed="rId1"/>
+          <a:stretch>
+            <a:fillRect/>
+          </a:stretch>
+        </p:blipFill>
+        <p:spPr>
+          <a:xfrm>
+            <a:off x="781812" y="4736592"/>
+            <a:ext cx="502920" cy="502920"/>
+          </a:xfrm>
+          <a:prstGeom prst="rect">
+            <a:avLst/>
+          </a:prstGeom>
+        </p:spPr>
+      </p:pic>
+      <p:sp>
+        <p:nvSpPr>
+          <p:cNvPr id="20" name="Shape 17"/>
+          <p:cNvSpPr/>
+          <p:nvPr/>
+        </p:nvSpPr>
+        <p:spPr>
+          <a:xfrm>
+            <a:off x="3886200" y="2194560"/>
+            <a:ext cx="0" cy="685800"/>
+          </a:xfrm>
+          <a:prstGeom prst="line">
+            <a:avLst/>
+          </a:prstGeom>
+          <a:noFill/>
+          <a:ln w="25400">
+            <a:solidFill>
+              <a:srgbClr val="132A46"/>
+            </a:solidFill>
+            <a:prstDash val="solid"/>
+          </a:ln>
+        </p:spPr>
+      </p:sp>
+      <p:sp>
+        <p:nvSpPr>
+          <p:cNvPr id="21" name="Shape 18"/>
+          <p:cNvSpPr/>
+          <p:nvPr/>
+        </p:nvSpPr>
+        <p:spPr>
+          <a:xfrm>
+            <a:off x="3867912" y="1901952"/>
+            <a:ext cx="502920" cy="502920"/>
+          </a:xfrm>
+          <a:prstGeom prst="ellipse">
+            <a:avLst/>
+          </a:prstGeom>
+          <a:solidFill>
+            <a:srgbClr val="F2A93B"/>
+          </a:solidFill>
+          <a:ln/>
+        </p:spPr>
+      </p:sp>
+      <p:pic>
+        <p:nvPicPr>
+          <p:cNvPr id="22" name="Image 1" descr="preencoded.png">    </p:cNvPr>
+          <p:cNvPicPr>
+            <a:picLocks noChangeAspect="1"/>
+          </p:cNvPicPr>
+          <p:nvPr/>
+        </p:nvPicPr>
+        <p:blipFill>
+          <a:blip r:embed="rId2"/>
+          <a:stretch>
+            <a:fillRect/>
+          </a:stretch>
+        </p:blipFill>
+        <p:spPr>
+          <a:xfrm>
+            <a:off x="3981069" y="2015109"/>
+            <a:ext cx="276606" cy="276606"/>
+          </a:xfrm>
+          <a:prstGeom prst="rect">
+            <a:avLst/>
+          </a:prstGeom>
+        </p:spPr>
+      </p:pic>
+      <p:sp>
+        <p:nvSpPr>
+          <p:cNvPr id="23" name="Text 19"/>
+          <p:cNvSpPr/>
+          <p:nvPr/>
+        </p:nvSpPr>
+        <p:spPr>
+          <a:xfrm>
+            <a:off x="1883664" y="1627632"/>
+            <a:ext cx="2743200" cy="274320"/>
+          </a:xfrm>
+          <a:prstGeom prst="rect">
+            <a:avLst/>
+          </a:prstGeom>
+          <a:noFill/>
+          <a:ln/>
+        </p:spPr>
+        <p:txBody>
+          <a:bodyPr wrap="square" lIns="0" tIns="0" rIns="0" bIns="0" rtlCol="0" anchor="ctr"/>
+          <a:lstStyle/>
+          <a:p>
+            <a:pPr algn="ctr" indent="0" marL="0">
+              <a:buNone/>
+            </a:pPr>
+            <a:r>
+              <a:rPr lang="en-US" sz="1000" i="1" dirty="0">
+                <a:solidFill>
+                  <a:srgbClr val="5B6472"/>
+                </a:solidFill>
+                <a:latin typeface="Calibri" pitchFamily="34" charset="0"/>
+                <a:ea typeface="Calibri" pitchFamily="34" charset="-122"/>
+                <a:cs typeface="Calibri" pitchFamily="34" charset="-120"/>
+              </a:rPr>
+              <a:t>信頼されるスポーツ栄養士へ</a:t>
+            </a:r>
+            <a:endParaRPr lang="en-US" sz="1000" dirty="0"/>
+          </a:p>
+        </p:txBody>
+      </p:sp>
+      <p:sp>
+        <p:nvSpPr>
+          <p:cNvPr id="24" name="Shape 20"/>
+          <p:cNvSpPr/>
+          <p:nvPr/>
+        </p:nvSpPr>
+        <p:spPr>
+          <a:xfrm>
+            <a:off x="4709160" y="1792224"/>
+            <a:ext cx="548640" cy="548640"/>
+          </a:xfrm>
+          <a:prstGeom prst="ellipse">
+            <a:avLst/>
+          </a:prstGeom>
+          <a:solidFill>
+            <a:srgbClr val="E08A1E"/>
+          </a:solidFill>
+          <a:ln/>
+        </p:spPr>
+      </p:sp>
+      <p:pic>
+        <p:nvPicPr>
+          <p:cNvPr id="25" name="Image 2" descr="preencoded.png">    </p:cNvPr>
+          <p:cNvPicPr>
+            <a:picLocks noChangeAspect="1"/>
+          </p:cNvPicPr>
+          <p:nvPr/>
+        </p:nvPicPr>
+        <p:blipFill>
+          <a:blip r:embed="rId3"/>
+          <a:stretch>
+            <a:fillRect/>
+          </a:stretch>
+        </p:blipFill>
+        <p:spPr>
+          <a:xfrm>
+            <a:off x="4846320" y="1929384"/>
+            <a:ext cx="274320" cy="274320"/>
+          </a:xfrm>
+          <a:prstGeom prst="rect">
+            <a:avLst/>
+          </a:prstGeom>
+        </p:spPr>
+      </p:pic>
+      <p:sp>
+        <p:nvSpPr>
+          <p:cNvPr id="26" name="Text 21"/>
+          <p:cNvSpPr/>
+          <p:nvPr/>
+        </p:nvSpPr>
+        <p:spPr>
+          <a:xfrm>
+            <a:off x="5458968" y="1719072"/>
+            <a:ext cx="6016752" cy="438912"/>
+          </a:xfrm>
+          <a:prstGeom prst="rect">
+            <a:avLst/>
+          </a:prstGeom>
+          <a:noFill/>
+          <a:ln/>
+        </p:spPr>
+        <p:txBody>
+          <a:bodyPr wrap="square" lIns="0" tIns="0" rIns="0" bIns="0" rtlCol="0" anchor="b"/>
+          <a:lstStyle/>
+          <a:p>
+            <a:pPr indent="0" marL="0">
+              <a:buNone/>
+            </a:pPr>
+            <a:r>
+              <a:rPr lang="en-US" sz="1450" b="1" dirty="0">
+                <a:solidFill>
+                  <a:srgbClr val="E08A1E"/>
+                </a:solidFill>
+                <a:latin typeface="Calibri" pitchFamily="34" charset="0"/>
+                <a:ea typeface="Calibri" pitchFamily="34" charset="-122"/>
+                <a:cs typeface="Calibri" pitchFamily="34" charset="-120"/>
+              </a:rPr>
+              <a:t>個別対応 ＋ トライ＆エラーが必須</a:t>
+            </a:r>
+            <a:endParaRPr lang="en-US" sz="1450" dirty="0"/>
+          </a:p>
+        </p:txBody>
+      </p:sp>
+      <p:sp>
+        <p:nvSpPr>
+          <p:cNvPr id="27" name="Text 22"/>
+          <p:cNvSpPr/>
+          <p:nvPr/>
+        </p:nvSpPr>
+        <p:spPr>
+          <a:xfrm>
+            <a:off x="5458968" y="2139696"/>
+            <a:ext cx="6016752" cy="365760"/>
+          </a:xfrm>
+          <a:prstGeom prst="rect">
+            <a:avLst/>
+          </a:prstGeom>
+          <a:noFill/>
+          <a:ln/>
+        </p:spPr>
+        <p:txBody>
+          <a:bodyPr wrap="square" lIns="0" tIns="0" rIns="0" bIns="0" rtlCol="0" anchor="t"/>
+          <a:lstStyle/>
+          <a:p>
+            <a:pPr indent="0" marL="0">
+              <a:buNone/>
+            </a:pPr>
+            <a:r>
+              <a:rPr lang="en-US" sz="1150" dirty="0">
+                <a:solidFill>
+                  <a:srgbClr val="5B6472"/>
+                </a:solidFill>
+                <a:latin typeface="Calibri" pitchFamily="34" charset="0"/>
+                <a:ea typeface="Calibri" pitchFamily="34" charset="-122"/>
+                <a:cs typeface="Calibri" pitchFamily="34" charset="-120"/>
+              </a:rPr>
+              <a:t>選手ごとに状況が異なり、基準値だけでは通用しない</a:t>
+            </a:r>
+            <a:endParaRPr lang="en-US" sz="1150" dirty="0"/>
+          </a:p>
+        </p:txBody>
+      </p:sp>
+      <p:sp>
+        <p:nvSpPr>
+          <p:cNvPr id="28" name="Shape 23"/>
+          <p:cNvSpPr/>
+          <p:nvPr/>
+        </p:nvSpPr>
+        <p:spPr>
+          <a:xfrm>
+            <a:off x="4709160" y="2724912"/>
+            <a:ext cx="548640" cy="548640"/>
+          </a:xfrm>
+          <a:prstGeom prst="ellipse">
+            <a:avLst/>
+          </a:prstGeom>
+          <a:solidFill>
+            <a:srgbClr val="E08A1E"/>
+          </a:solidFill>
+          <a:ln/>
+        </p:spPr>
+      </p:sp>
+      <p:pic>
+        <p:nvPicPr>
+          <p:cNvPr id="29" name="Image 3" descr="preencoded.png">    </p:cNvPr>
+          <p:cNvPicPr>
+            <a:picLocks noChangeAspect="1"/>
+          </p:cNvPicPr>
+          <p:nvPr/>
+        </p:nvPicPr>
+        <p:blipFill>
+          <a:blip r:embed="rId4"/>
+          <a:stretch>
+            <a:fillRect/>
+          </a:stretch>
+        </p:blipFill>
+        <p:spPr>
+          <a:xfrm>
+            <a:off x="4846320" y="2862072"/>
+            <a:ext cx="274320" cy="274320"/>
+          </a:xfrm>
+          <a:prstGeom prst="rect">
+            <a:avLst/>
+          </a:prstGeom>
+        </p:spPr>
+      </p:pic>
+      <p:sp>
+        <p:nvSpPr>
+          <p:cNvPr id="30" name="Text 24"/>
+          <p:cNvSpPr/>
+          <p:nvPr/>
+        </p:nvSpPr>
+        <p:spPr>
+          <a:xfrm>
+            <a:off x="5458968" y="2651760"/>
+            <a:ext cx="6016752" cy="438912"/>
+          </a:xfrm>
+          <a:prstGeom prst="rect">
+            <a:avLst/>
+          </a:prstGeom>
+          <a:noFill/>
+          <a:ln/>
+        </p:spPr>
+        <p:txBody>
+          <a:bodyPr wrap="square" lIns="0" tIns="0" rIns="0" bIns="0" rtlCol="0" anchor="b"/>
+          <a:lstStyle/>
+          <a:p>
+            <a:pPr indent="0" marL="0">
+              <a:buNone/>
+            </a:pPr>
+            <a:r>
+              <a:rPr lang="en-US" sz="1450" b="1" dirty="0">
+                <a:solidFill>
+                  <a:srgbClr val="E08A1E"/>
+                </a:solidFill>
+                <a:latin typeface="Calibri" pitchFamily="34" charset="0"/>
+                <a:ea typeface="Calibri" pitchFamily="34" charset="-122"/>
+                <a:cs typeface="Calibri" pitchFamily="34" charset="-120"/>
+              </a:rPr>
+              <a:t>同等の熱量 or データ・知識で対抗</a:t>
+            </a:r>
+            <a:endParaRPr lang="en-US" sz="1450" dirty="0"/>
+          </a:p>
+        </p:txBody>
+      </p:sp>
+      <p:sp>
+        <p:nvSpPr>
+          <p:cNvPr id="31" name="Text 25"/>
+          <p:cNvSpPr/>
+          <p:nvPr/>
+        </p:nvSpPr>
+        <p:spPr>
+          <a:xfrm>
+            <a:off x="5458968" y="3072384"/>
+            <a:ext cx="6016752" cy="365760"/>
+          </a:xfrm>
+          <a:prstGeom prst="rect">
+            <a:avLst/>
+          </a:prstGeom>
+          <a:noFill/>
+          <a:ln/>
+        </p:spPr>
+        <p:txBody>
+          <a:bodyPr wrap="square" lIns="0" tIns="0" rIns="0" bIns="0" rtlCol="0" anchor="t"/>
+          <a:lstStyle/>
+          <a:p>
+            <a:pPr indent="0" marL="0">
+              <a:buNone/>
+            </a:pPr>
+            <a:r>
+              <a:rPr lang="en-US" sz="1150" dirty="0">
+                <a:solidFill>
+                  <a:srgbClr val="5B6472"/>
+                </a:solidFill>
+                <a:latin typeface="Calibri" pitchFamily="34" charset="0"/>
+                <a:ea typeface="Calibri" pitchFamily="34" charset="-122"/>
+                <a:cs typeface="Calibri" pitchFamily="34" charset="-120"/>
+              </a:rPr>
+              <a:t>選手は「1分1秒」を削りにきている</a:t>
+            </a:r>
+            <a:endParaRPr lang="en-US" sz="1150" dirty="0"/>
+          </a:p>
+        </p:txBody>
+      </p:sp>
+      <p:sp>
+        <p:nvSpPr>
+          <p:cNvPr id="32" name="Shape 26"/>
+          <p:cNvSpPr/>
+          <p:nvPr/>
+        </p:nvSpPr>
+        <p:spPr>
+          <a:xfrm>
+            <a:off x="4709160" y="3657600"/>
+            <a:ext cx="548640" cy="548640"/>
+          </a:xfrm>
+          <a:prstGeom prst="ellipse">
+            <a:avLst/>
+          </a:prstGeom>
+          <a:solidFill>
+            <a:srgbClr val="E08A1E"/>
+          </a:solidFill>
+          <a:ln/>
+        </p:spPr>
+      </p:sp>
+      <p:pic>
+        <p:nvPicPr>
+          <p:cNvPr id="33" name="Image 4" descr="preencoded.png">    </p:cNvPr>
+          <p:cNvPicPr>
+            <a:picLocks noChangeAspect="1"/>
+          </p:cNvPicPr>
+          <p:nvPr/>
+        </p:nvPicPr>
+        <p:blipFill>
+          <a:blip r:embed="rId5"/>
+          <a:stretch>
+            <a:fillRect/>
+          </a:stretch>
+        </p:blipFill>
+        <p:spPr>
+          <a:xfrm>
+            <a:off x="4846320" y="3794760"/>
+            <a:ext cx="274320" cy="274320"/>
+          </a:xfrm>
+          <a:prstGeom prst="rect">
+            <a:avLst/>
+          </a:prstGeom>
+        </p:spPr>
+      </p:pic>
+      <p:sp>
+        <p:nvSpPr>
+          <p:cNvPr id="34" name="Text 27"/>
+          <p:cNvSpPr/>
+          <p:nvPr/>
+        </p:nvSpPr>
+        <p:spPr>
+          <a:xfrm>
+            <a:off x="5458968" y="3584448"/>
+            <a:ext cx="6016752" cy="438912"/>
+          </a:xfrm>
+          <a:prstGeom prst="rect">
+            <a:avLst/>
+          </a:prstGeom>
+          <a:noFill/>
+          <a:ln/>
+        </p:spPr>
+        <p:txBody>
+          <a:bodyPr wrap="square" lIns="0" tIns="0" rIns="0" bIns="0" rtlCol="0" anchor="b"/>
+          <a:lstStyle/>
+          <a:p>
+            <a:pPr indent="0" marL="0">
+              <a:buNone/>
+            </a:pPr>
+            <a:r>
+              <a:rPr lang="en-US" sz="1450" b="1" dirty="0">
+                <a:solidFill>
+                  <a:srgbClr val="E08A1E"/>
+                </a:solidFill>
+                <a:latin typeface="Calibri" pitchFamily="34" charset="0"/>
+                <a:ea typeface="Calibri" pitchFamily="34" charset="-122"/>
+                <a:cs typeface="Calibri" pitchFamily="34" charset="-120"/>
+              </a:rPr>
+              <a:t>英語論文・海外データの収集と活用</a:t>
+            </a:r>
+            <a:endParaRPr lang="en-US" sz="1450" dirty="0"/>
+          </a:p>
+        </p:txBody>
+      </p:sp>
+      <p:sp>
+        <p:nvSpPr>
+          <p:cNvPr id="35" name="Text 28"/>
+          <p:cNvSpPr/>
+          <p:nvPr/>
+        </p:nvSpPr>
+        <p:spPr>
+          <a:xfrm>
+            <a:off x="5458968" y="4005072"/>
+            <a:ext cx="6016752" cy="365760"/>
+          </a:xfrm>
+          <a:prstGeom prst="rect">
+            <a:avLst/>
+          </a:prstGeom>
+          <a:noFill/>
+          <a:ln/>
+        </p:spPr>
+        <p:txBody>
+          <a:bodyPr wrap="square" lIns="0" tIns="0" rIns="0" bIns="0" rtlCol="0" anchor="t"/>
+          <a:lstStyle/>
+          <a:p>
+            <a:pPr indent="0" marL="0">
+              <a:buNone/>
+            </a:pPr>
+            <a:r>
+              <a:rPr lang="en-US" sz="1150" dirty="0">
+                <a:solidFill>
+                  <a:srgbClr val="5B6472"/>
+                </a:solidFill>
+                <a:latin typeface="Calibri" pitchFamily="34" charset="0"/>
+                <a:ea typeface="Calibri" pitchFamily="34" charset="-122"/>
+                <a:cs typeface="Calibri" pitchFamily="34" charset="-120"/>
+              </a:rPr>
+              <a:t>国際レベルで戦う選手は情報戦</a:t>
+            </a:r>
+            <a:endParaRPr lang="en-US" sz="1150" dirty="0"/>
+          </a:p>
+        </p:txBody>
+      </p:sp>
+      <p:sp>
+        <p:nvSpPr>
+          <p:cNvPr id="36" name="Shape 29"/>
+          <p:cNvSpPr/>
+          <p:nvPr/>
+        </p:nvSpPr>
+        <p:spPr>
+          <a:xfrm>
+            <a:off x="4709160" y="4590288"/>
+            <a:ext cx="548640" cy="548640"/>
+          </a:xfrm>
+          <a:prstGeom prst="ellipse">
+            <a:avLst/>
+          </a:prstGeom>
+          <a:solidFill>
+            <a:srgbClr val="E08A1E"/>
+          </a:solidFill>
+          <a:ln/>
+        </p:spPr>
+      </p:sp>
+      <p:pic>
+        <p:nvPicPr>
+          <p:cNvPr id="37" name="Image 5" descr="preencoded.png">    </p:cNvPr>
+          <p:cNvPicPr>
+            <a:picLocks noChangeAspect="1"/>
+          </p:cNvPicPr>
+          <p:nvPr/>
+        </p:nvPicPr>
+        <p:blipFill>
+          <a:blip r:embed="rId6"/>
+          <a:stretch>
+            <a:fillRect/>
+          </a:stretch>
+        </p:blipFill>
+        <p:spPr>
+          <a:xfrm>
+            <a:off x="4846320" y="4727448"/>
+            <a:ext cx="274320" cy="274320"/>
+          </a:xfrm>
+          <a:prstGeom prst="rect">
+            <a:avLst/>
+          </a:prstGeom>
+        </p:spPr>
+      </p:pic>
+      <p:sp>
+        <p:nvSpPr>
+          <p:cNvPr id="38" name="Text 30"/>
+          <p:cNvSpPr/>
+          <p:nvPr/>
+        </p:nvSpPr>
+        <p:spPr>
+          <a:xfrm>
+            <a:off x="5458968" y="4517136"/>
+            <a:ext cx="6016752" cy="438912"/>
+          </a:xfrm>
+          <a:prstGeom prst="rect">
+            <a:avLst/>
+          </a:prstGeom>
+          <a:noFill/>
+          <a:ln/>
+        </p:spPr>
+        <p:txBody>
+          <a:bodyPr wrap="square" lIns="0" tIns="0" rIns="0" bIns="0" rtlCol="0" anchor="b"/>
+          <a:lstStyle/>
+          <a:p>
+            <a:pPr indent="0" marL="0">
+              <a:buNone/>
+            </a:pPr>
+            <a:r>
+              <a:rPr lang="en-US" sz="1450" b="1" dirty="0">
+                <a:solidFill>
+                  <a:srgbClr val="E08A1E"/>
+                </a:solidFill>
+                <a:latin typeface="Calibri" pitchFamily="34" charset="0"/>
+                <a:ea typeface="Calibri" pitchFamily="34" charset="-122"/>
+                <a:cs typeface="Calibri" pitchFamily="34" charset="-120"/>
+              </a:rPr>
+              <a:t>運動生理学などスポーツ科学の理解</a:t>
+            </a:r>
+            <a:endParaRPr lang="en-US" sz="1450" dirty="0"/>
+          </a:p>
+        </p:txBody>
+      </p:sp>
+      <p:sp>
+        <p:nvSpPr>
+          <p:cNvPr id="39" name="Text 31"/>
+          <p:cNvSpPr/>
+          <p:nvPr/>
+        </p:nvSpPr>
+        <p:spPr>
+          <a:xfrm>
+            <a:off x="5458968" y="4937760"/>
+            <a:ext cx="6016752" cy="365760"/>
+          </a:xfrm>
+          <a:prstGeom prst="rect">
+            <a:avLst/>
+          </a:prstGeom>
+          <a:noFill/>
+          <a:ln/>
+        </p:spPr>
+        <p:txBody>
+          <a:bodyPr wrap="square" lIns="0" tIns="0" rIns="0" bIns="0" rtlCol="0" anchor="t"/>
+          <a:lstStyle/>
+          <a:p>
+            <a:pPr indent="0" marL="0">
+              <a:buNone/>
+            </a:pPr>
+            <a:r>
+              <a:rPr lang="en-US" sz="1150" dirty="0">
+                <a:solidFill>
+                  <a:srgbClr val="5B6472"/>
+                </a:solidFill>
+                <a:latin typeface="Calibri" pitchFamily="34" charset="0"/>
+                <a:ea typeface="Calibri" pitchFamily="34" charset="-122"/>
+                <a:cs typeface="Calibri" pitchFamily="34" charset="-120"/>
+              </a:rPr>
+              <a:t>栄養学の知識だけでは不十分</a:t>
+            </a:r>
+            <a:endParaRPr lang="en-US" sz="1150" dirty="0"/>
+          </a:p>
+        </p:txBody>
+      </p:sp>
+      <p:sp>
+        <p:nvSpPr>
+          <p:cNvPr id="40" name="Shape 32"/>
+          <p:cNvSpPr/>
+          <p:nvPr/>
+        </p:nvSpPr>
+        <p:spPr>
+          <a:xfrm>
+            <a:off x="4709160" y="5522976"/>
+            <a:ext cx="548640" cy="548640"/>
+          </a:xfrm>
+          <a:prstGeom prst="ellipse">
+            <a:avLst/>
+          </a:prstGeom>
+          <a:solidFill>
+            <a:srgbClr val="E08A1E"/>
+          </a:solidFill>
+          <a:ln/>
+        </p:spPr>
+      </p:sp>
+      <p:pic>
+        <p:nvPicPr>
+          <p:cNvPr id="41" name="Image 6" descr="preencoded.png">    </p:cNvPr>
+          <p:cNvPicPr>
+            <a:picLocks noChangeAspect="1"/>
+          </p:cNvPicPr>
+          <p:nvPr/>
+        </p:nvPicPr>
+        <p:blipFill>
+          <a:blip r:embed="rId7"/>
+          <a:stretch>
+            <a:fillRect/>
+          </a:stretch>
+        </p:blipFill>
+        <p:spPr>
+          <a:xfrm>
+            <a:off x="4846320" y="5660136"/>
+            <a:ext cx="274320" cy="274320"/>
+          </a:xfrm>
+          <a:prstGeom prst="rect">
+            <a:avLst/>
+          </a:prstGeom>
+        </p:spPr>
+      </p:pic>
+      <p:sp>
+        <p:nvSpPr>
+          <p:cNvPr id="42" name="Text 33"/>
+          <p:cNvSpPr/>
+          <p:nvPr/>
+        </p:nvSpPr>
+        <p:spPr>
+          <a:xfrm>
+            <a:off x="5458968" y="5449824"/>
+            <a:ext cx="6016752" cy="438912"/>
+          </a:xfrm>
+          <a:prstGeom prst="rect">
+            <a:avLst/>
+          </a:prstGeom>
+          <a:noFill/>
+          <a:ln/>
+        </p:spPr>
+        <p:txBody>
+          <a:bodyPr wrap="square" lIns="0" tIns="0" rIns="0" bIns="0" rtlCol="0" anchor="b"/>
+          <a:lstStyle/>
+          <a:p>
+            <a:pPr indent="0" marL="0">
+              <a:buNone/>
+            </a:pPr>
+            <a:r>
+              <a:rPr lang="en-US" sz="1450" b="1" dirty="0">
+                <a:solidFill>
+                  <a:srgbClr val="E08A1E"/>
+                </a:solidFill>
+                <a:latin typeface="Calibri" pitchFamily="34" charset="0"/>
+                <a:ea typeface="Calibri" pitchFamily="34" charset="-122"/>
+                <a:cs typeface="Calibri" pitchFamily="34" charset="-120"/>
+              </a:rPr>
+              <a:t>蓄積する力・読む力・集める力・応用する力</a:t>
+            </a:r>
+            <a:endParaRPr lang="en-US" sz="1450" dirty="0"/>
+          </a:p>
+        </p:txBody>
+      </p:sp>
+      <p:sp>
+        <p:nvSpPr>
+          <p:cNvPr id="43" name="Text 34"/>
+          <p:cNvSpPr/>
+          <p:nvPr/>
+        </p:nvSpPr>
+        <p:spPr>
+          <a:xfrm>
+            <a:off x="5458968" y="5870448"/>
+            <a:ext cx="6016752" cy="365760"/>
+          </a:xfrm>
+          <a:prstGeom prst="rect">
+            <a:avLst/>
+          </a:prstGeom>
+          <a:noFill/>
+          <a:ln/>
+        </p:spPr>
+        <p:txBody>
+          <a:bodyPr wrap="square" lIns="0" tIns="0" rIns="0" bIns="0" rtlCol="0" anchor="t"/>
+          <a:lstStyle/>
+          <a:p>
+            <a:pPr indent="0" marL="0">
+              <a:buNone/>
+            </a:pPr>
+            <a:r>
+              <a:rPr lang="en-US" sz="1150" dirty="0">
+                <a:solidFill>
+                  <a:srgbClr val="5B6472"/>
+                </a:solidFill>
+                <a:latin typeface="Calibri" pitchFamily="34" charset="0"/>
+                <a:ea typeface="Calibri" pitchFamily="34" charset="-122"/>
+                <a:cs typeface="Calibri" pitchFamily="34" charset="-120"/>
+              </a:rPr>
+              <a:t>データがすべての土台になる</a:t>
+            </a:r>
+            <a:endParaRPr lang="en-US" sz="1150" dirty="0"/>
+          </a:p>
+        </p:txBody>
+      </p:sp>
+      <p:sp>
+        <p:nvSpPr>
+          <p:cNvPr id="44" name="Text 35"/>
+          <p:cNvSpPr/>
+          <p:nvPr/>
+        </p:nvSpPr>
+        <p:spPr>
+          <a:xfrm>
+            <a:off x="457200" y="6473952"/>
+            <a:ext cx="7315200" cy="274320"/>
+          </a:xfrm>
+          <a:prstGeom prst="rect">
+            <a:avLst/>
+          </a:prstGeom>
+          <a:noFill/>
+          <a:ln/>
+        </p:spPr>
+        <p:txBody>
+          <a:bodyPr wrap="square" lIns="0" tIns="0" rIns="0" bIns="0" rtlCol="0" anchor="ctr"/>
+          <a:lstStyle/>
+          <a:p>
+            <a:pPr algn="l" indent="0" marL="0">
+              <a:buNone/>
+            </a:pPr>
+            <a:r>
+              <a:rPr lang="en-US" sz="900" dirty="0">
+                <a:solidFill>
+                  <a:srgbClr val="5B6472"/>
+                </a:solidFill>
+                <a:latin typeface="Calibri" pitchFamily="34" charset="0"/>
+                <a:ea typeface="Calibri" pitchFamily="34" charset="-122"/>
+                <a:cs typeface="Calibri" pitchFamily="34" charset="-120"/>
+              </a:rPr>
+              <a:t>スポーツ管理栄養士講義 ｜ 協力：スミフルジャパン</a:t>
+            </a:r>
+            <a:endParaRPr lang="en-US" sz="900" dirty="0"/>
+          </a:p>
+        </p:txBody>
+      </p:sp>
+      <p:sp>
+        <p:nvSpPr>
+          <p:cNvPr id="45" name="Text 36"/>
+          <p:cNvSpPr/>
+          <p:nvPr/>
+        </p:nvSpPr>
+        <p:spPr>
+          <a:xfrm>
+            <a:off x="11277295" y="6473952"/>
+            <a:ext cx="548640" cy="274320"/>
+          </a:xfrm>
+          <a:prstGeom prst="rect">
+            <a:avLst/>
+          </a:prstGeom>
+          <a:noFill/>
+          <a:ln/>
+        </p:spPr>
+        <p:txBody>
+          <a:bodyPr wrap="square" lIns="0" tIns="0" rIns="0" bIns="0" rtlCol="0" anchor="ctr"/>
+          <a:lstStyle/>
+          <a:p>
+            <a:pPr algn="r" indent="0" marL="0">
+              <a:buNone/>
+            </a:pPr>
+            <a:r>
+              <a:rPr lang="en-US" sz="900" dirty="0">
+                <a:solidFill>
+                  <a:srgbClr val="5B6472"/>
+                </a:solidFill>
+                <a:latin typeface="Calibri" pitchFamily="34" charset="0"/>
+                <a:ea typeface="Calibri" pitchFamily="34" charset="-122"/>
+                <a:cs typeface="Calibri" pitchFamily="34" charset="-120"/>
+              </a:rPr>
+              <a:t>05</a:t>
+            </a:r>
+            <a:endParaRPr lang="en-US" sz="900" dirty="0"/>
+          </a:p>
+        </p:txBody>
+      </p:sp>
+    </p:spTree>
+  </p:cSld>
+  <p:clrMapOvr>
+    <a:masterClrMapping/>
+  </p:clrMapOvr>
+</p:sld>
+</file>
+
+<file path=ppt/slides/slide6.xml><?xml version="1.0" encoding="utf-8"?>
+<p:sld xmlns:a="http://schemas.openxmlformats.org/drawingml/2006/main" xmlns:r="http://schemas.openxmlformats.org/officeDocument/2006/relationships" xmlns:p="http://schemas.openxmlformats.org/presentationml/2006/main">
+  <p:cSld name="Slide 6">
+    <p:bg>
+      <p:bgPr>
+        <a:solidFill>
           <a:srgbClr val="132A46"/>
         </a:solidFill>
       </p:bgPr>
@@ -5824,9 +8447,9 @@
 </p:sld>
 </file>
 
-<file path=ppt/slides/slide6.xml><?xml version="1.0" encoding="utf-8"?>
+<file path=ppt/slides/slide7.xml><?xml version="1.0" encoding="utf-8"?>
 <p:sld xmlns:a="http://schemas.openxmlformats.org/drawingml/2006/main" xmlns:r="http://schemas.openxmlformats.org/officeDocument/2006/relationships" xmlns:p="http://schemas.openxmlformats.org/presentationml/2006/main">
-  <p:cSld name="Slide 6">
+  <p:cSld name="Slide 7">
     <p:bg>
       <p:bgPr>
         <a:solidFill>
@@ -6492,545 +9115,6 @@
               <a:rPr lang="en-US" sz="900" dirty="0">
                 <a:solidFill>
                   <a:srgbClr val="5B6472"/>
-                </a:solidFill>
-                <a:latin typeface="Calibri" pitchFamily="34" charset="0"/>
-                <a:ea typeface="Calibri" pitchFamily="34" charset="-122"/>
-                <a:cs typeface="Calibri" pitchFamily="34" charset="-120"/>
-              </a:rPr>
-              <a:t>06</a:t>
-            </a:r>
-            <a:endParaRPr lang="en-US" sz="900" dirty="0"/>
-          </a:p>
-        </p:txBody>
-      </p:sp>
-    </p:spTree>
-  </p:cSld>
-  <p:clrMapOvr>
-    <a:masterClrMapping/>
-  </p:clrMapOvr>
-</p:sld>
-</file>
-
-<file path=ppt/slides/slide7.xml><?xml version="1.0" encoding="utf-8"?>
-<p:sld xmlns:a="http://schemas.openxmlformats.org/drawingml/2006/main" xmlns:r="http://schemas.openxmlformats.org/officeDocument/2006/relationships" xmlns:p="http://schemas.openxmlformats.org/presentationml/2006/main">
-  <p:cSld name="Slide 7">
-    <p:bg>
-      <p:bgPr>
-        <a:solidFill>
-          <a:srgbClr val="132A46"/>
-        </a:solidFill>
-      </p:bgPr>
-    </p:bg>
-    <p:spTree>
-      <p:nvGrpSpPr>
-        <p:cNvPr id="1" name=""/>
-        <p:cNvGrpSpPr/>
-        <p:nvPr/>
-      </p:nvGrpSpPr>
-      <p:grpSpPr>
-        <a:xfrm>
-          <a:off x="0" y="0"/>
-          <a:ext cx="0" cy="0"/>
-          <a:chOff x="0" y="0"/>
-          <a:chExt cx="0" cy="0"/>
-        </a:xfrm>
-      </p:grpSpPr>
-      <p:sp>
-        <p:nvSpPr>
-          <p:cNvPr id="2" name="Text 0"/>
-          <p:cNvSpPr/>
-          <p:nvPr/>
-        </p:nvSpPr>
-        <p:spPr>
-          <a:xfrm>
-            <a:off x="731520" y="457200"/>
-            <a:ext cx="10058400" cy="502920"/>
-          </a:xfrm>
-          <a:prstGeom prst="rect">
-            <a:avLst/>
-          </a:prstGeom>
-          <a:noFill/>
-          <a:ln/>
-        </p:spPr>
-        <p:txBody>
-          <a:bodyPr wrap="square" lIns="0" tIns="0" rIns="0" bIns="0" rtlCol="0" anchor="ctr"/>
-          <a:lstStyle/>
-          <a:p>
-            <a:pPr indent="0" marL="0">
-              <a:buNone/>
-            </a:pPr>
-            <a:r>
-              <a:rPr lang="en-US" sz="2200" b="1" dirty="0">
-                <a:solidFill>
-                  <a:srgbClr val="FFFFFF"/>
-                </a:solidFill>
-                <a:latin typeface="Cambria" pitchFamily="34" charset="0"/>
-                <a:ea typeface="Cambria" pitchFamily="34" charset="-122"/>
-                <a:cs typeface="Cambria" pitchFamily="34" charset="-120"/>
-              </a:rPr>
-              <a:t>事例②　海外遠征・ホテル生活での食環境づくり</a:t>
-            </a:r>
-            <a:endParaRPr lang="en-US" sz="2200" dirty="0"/>
-          </a:p>
-        </p:txBody>
-      </p:sp>
-      <p:sp>
-        <p:nvSpPr>
-          <p:cNvPr id="3" name="Shape 1"/>
-          <p:cNvSpPr/>
-          <p:nvPr/>
-        </p:nvSpPr>
-        <p:spPr>
-          <a:xfrm>
-            <a:off x="731520" y="1234440"/>
-            <a:ext cx="914400" cy="914400"/>
-          </a:xfrm>
-          <a:prstGeom prst="ellipse">
-            <a:avLst/>
-          </a:prstGeom>
-          <a:solidFill>
-            <a:srgbClr val="F2A93B"/>
-          </a:solidFill>
-          <a:ln/>
-        </p:spPr>
-      </p:sp>
-      <p:pic>
-        <p:nvPicPr>
-          <p:cNvPr id="4" name="Image 0" descr="preencoded.png">    </p:cNvPr>
-          <p:cNvPicPr>
-            <a:picLocks noChangeAspect="1"/>
-          </p:cNvPicPr>
-          <p:nvPr/>
-        </p:nvPicPr>
-        <p:blipFill>
-          <a:blip r:embed="rId1"/>
-          <a:stretch>
-            <a:fillRect/>
-          </a:stretch>
-        </p:blipFill>
-        <p:spPr>
-          <a:xfrm>
-            <a:off x="960120" y="1463040"/>
-            <a:ext cx="457200" cy="457200"/>
-          </a:xfrm>
-          <a:prstGeom prst="rect">
-            <a:avLst/>
-          </a:prstGeom>
-        </p:spPr>
-      </p:pic>
-      <p:sp>
-        <p:nvSpPr>
-          <p:cNvPr id="5" name="Text 2"/>
-          <p:cNvSpPr/>
-          <p:nvPr/>
-        </p:nvSpPr>
-        <p:spPr>
-          <a:xfrm>
-            <a:off x="1874520" y="1234440"/>
-            <a:ext cx="9418320" cy="914400"/>
-          </a:xfrm>
-          <a:prstGeom prst="rect">
-            <a:avLst/>
-          </a:prstGeom>
-          <a:noFill/>
-          <a:ln/>
-        </p:spPr>
-        <p:txBody>
-          <a:bodyPr wrap="square" lIns="0" tIns="0" rIns="0" bIns="0" rtlCol="0" anchor="ctr"/>
-          <a:lstStyle/>
-          <a:p>
-            <a:pPr indent="0" marL="0">
-              <a:lnSpc>
-                <a:spcPts val="2200"/>
-              </a:lnSpc>
-              <a:buNone/>
-            </a:pPr>
-            <a:r>
-              <a:rPr lang="en-US" sz="1500" dirty="0">
-                <a:solidFill>
-                  <a:srgbClr val="D8DEE9"/>
-                </a:solidFill>
-                <a:latin typeface="Calibri" pitchFamily="34" charset="0"/>
-                <a:ea typeface="Calibri" pitchFamily="34" charset="-122"/>
-                <a:cs typeface="Calibri" pitchFamily="34" charset="-120"/>
-              </a:rPr>
-              <a:t>海外遠征では、現地の食事が合わずに体重やパフォーマンスが落ちてしまう選手が少なくありません。</a:t>
-            </a:r>
-            <a:endParaRPr lang="en-US" sz="1500" dirty="0"/>
-          </a:p>
-        </p:txBody>
-      </p:sp>
-      <p:sp>
-        <p:nvSpPr>
-          <p:cNvPr id="6" name="Shape 3"/>
-          <p:cNvSpPr/>
-          <p:nvPr/>
-        </p:nvSpPr>
-        <p:spPr>
-          <a:xfrm>
-            <a:off x="731520" y="2514600"/>
-            <a:ext cx="5166360" cy="3383280"/>
-          </a:xfrm>
-          <a:prstGeom prst="roundRect">
-            <a:avLst>
-              <a:gd name="adj" fmla="val 3243"/>
-            </a:avLst>
-          </a:prstGeom>
-          <a:solidFill>
-            <a:srgbClr val="0D1F35"/>
-          </a:solidFill>
-          <a:ln w="12700">
-            <a:solidFill>
-              <a:srgbClr val="2B4562"/>
-            </a:solidFill>
-            <a:prstDash val="solid"/>
-          </a:ln>
-        </p:spPr>
-      </p:sp>
-      <p:sp>
-        <p:nvSpPr>
-          <p:cNvPr id="7" name="Shape 4"/>
-          <p:cNvSpPr/>
-          <p:nvPr/>
-        </p:nvSpPr>
-        <p:spPr>
-          <a:xfrm>
-            <a:off x="1097280" y="2880360"/>
-            <a:ext cx="822960" cy="822960"/>
-          </a:xfrm>
-          <a:prstGeom prst="ellipse">
-            <a:avLst/>
-          </a:prstGeom>
-          <a:solidFill>
-            <a:srgbClr val="F2A93B"/>
-          </a:solidFill>
-          <a:ln/>
-        </p:spPr>
-      </p:sp>
-      <p:pic>
-        <p:nvPicPr>
-          <p:cNvPr id="8" name="Image 1" descr="preencoded.png">    </p:cNvPr>
-          <p:cNvPicPr>
-            <a:picLocks noChangeAspect="1"/>
-          </p:cNvPicPr>
-          <p:nvPr/>
-        </p:nvPicPr>
-        <p:blipFill>
-          <a:blip r:embed="rId2"/>
-          <a:stretch>
-            <a:fillRect/>
-          </a:stretch>
-        </p:blipFill>
-        <p:spPr>
-          <a:xfrm>
-            <a:off x="1303020" y="3086100"/>
-            <a:ext cx="411480" cy="411480"/>
-          </a:xfrm>
-          <a:prstGeom prst="rect">
-            <a:avLst/>
-          </a:prstGeom>
-        </p:spPr>
-      </p:pic>
-      <p:sp>
-        <p:nvSpPr>
-          <p:cNvPr id="9" name="Text 5"/>
-          <p:cNvSpPr/>
-          <p:nvPr/>
-        </p:nvSpPr>
-        <p:spPr>
-          <a:xfrm>
-            <a:off x="1097280" y="3886200"/>
-            <a:ext cx="4434840" cy="457200"/>
-          </a:xfrm>
-          <a:prstGeom prst="rect">
-            <a:avLst/>
-          </a:prstGeom>
-          <a:noFill/>
-          <a:ln/>
-        </p:spPr>
-        <p:txBody>
-          <a:bodyPr wrap="square" lIns="0" tIns="0" rIns="0" bIns="0" rtlCol="0" anchor="ctr"/>
-          <a:lstStyle/>
-          <a:p>
-            <a:pPr indent="0" marL="0">
-              <a:buNone/>
-            </a:pPr>
-            <a:r>
-              <a:rPr lang="en-US" sz="1800" b="1" dirty="0">
-                <a:solidFill>
-                  <a:srgbClr val="F2A93B"/>
-                </a:solidFill>
-                <a:latin typeface="Cambria" pitchFamily="34" charset="0"/>
-                <a:ea typeface="Cambria" pitchFamily="34" charset="-122"/>
-                <a:cs typeface="Cambria" pitchFamily="34" charset="-120"/>
-              </a:rPr>
-              <a:t>シェフとの交渉</a:t>
-            </a:r>
-            <a:endParaRPr lang="en-US" sz="1800" dirty="0"/>
-          </a:p>
-        </p:txBody>
-      </p:sp>
-      <p:sp>
-        <p:nvSpPr>
-          <p:cNvPr id="10" name="Text 6"/>
-          <p:cNvSpPr/>
-          <p:nvPr/>
-        </p:nvSpPr>
-        <p:spPr>
-          <a:xfrm>
-            <a:off x="1097280" y="4389120"/>
-            <a:ext cx="4434840" cy="1371600"/>
-          </a:xfrm>
-          <a:prstGeom prst="rect">
-            <a:avLst/>
-          </a:prstGeom>
-          <a:noFill/>
-          <a:ln/>
-        </p:spPr>
-        <p:txBody>
-          <a:bodyPr wrap="square" lIns="0" tIns="0" rIns="0" bIns="0" rtlCol="0" anchor="ctr"/>
-          <a:lstStyle/>
-          <a:p>
-            <a:pPr indent="0" marL="0">
-              <a:lnSpc>
-                <a:spcPts val="2200"/>
-              </a:lnSpc>
-              <a:buNone/>
-            </a:pPr>
-            <a:r>
-              <a:rPr lang="en-US" sz="1350" dirty="0">
-                <a:solidFill>
-                  <a:srgbClr val="FFFFFF"/>
-                </a:solidFill>
-                <a:latin typeface="Calibri" pitchFamily="34" charset="0"/>
-                <a:ea typeface="Calibri" pitchFamily="34" charset="-122"/>
-                <a:cs typeface="Calibri" pitchFamily="34" charset="-120"/>
-              </a:rPr>
-              <a:t>管理栄養士が現地に同行し、ホテルのシェフと交渉して日本食に近いメニューを作ってもらう</a:t>
-            </a:r>
-            <a:endParaRPr lang="en-US" sz="1350" dirty="0"/>
-          </a:p>
-        </p:txBody>
-      </p:sp>
-      <p:sp>
-        <p:nvSpPr>
-          <p:cNvPr id="11" name="Shape 7"/>
-          <p:cNvSpPr/>
-          <p:nvPr/>
-        </p:nvSpPr>
-        <p:spPr>
-          <a:xfrm>
-            <a:off x="6291072" y="2514600"/>
-            <a:ext cx="5166360" cy="3383280"/>
-          </a:xfrm>
-          <a:prstGeom prst="roundRect">
-            <a:avLst>
-              <a:gd name="adj" fmla="val 3243"/>
-            </a:avLst>
-          </a:prstGeom>
-          <a:solidFill>
-            <a:srgbClr val="0D1F35"/>
-          </a:solidFill>
-          <a:ln w="12700">
-            <a:solidFill>
-              <a:srgbClr val="2B4562"/>
-            </a:solidFill>
-            <a:prstDash val="solid"/>
-          </a:ln>
-        </p:spPr>
-      </p:sp>
-      <p:sp>
-        <p:nvSpPr>
-          <p:cNvPr id="12" name="Shape 8"/>
-          <p:cNvSpPr/>
-          <p:nvPr/>
-        </p:nvSpPr>
-        <p:spPr>
-          <a:xfrm>
-            <a:off x="6656832" y="2880360"/>
-            <a:ext cx="822960" cy="822960"/>
-          </a:xfrm>
-          <a:prstGeom prst="ellipse">
-            <a:avLst/>
-          </a:prstGeom>
-          <a:solidFill>
-            <a:srgbClr val="F2A93B"/>
-          </a:solidFill>
-          <a:ln/>
-        </p:spPr>
-      </p:sp>
-      <p:pic>
-        <p:nvPicPr>
-          <p:cNvPr id="13" name="Image 2" descr="preencoded.png">    </p:cNvPr>
-          <p:cNvPicPr>
-            <a:picLocks noChangeAspect="1"/>
-          </p:cNvPicPr>
-          <p:nvPr/>
-        </p:nvPicPr>
-        <p:blipFill>
-          <a:blip r:embed="rId3"/>
-          <a:stretch>
-            <a:fillRect/>
-          </a:stretch>
-        </p:blipFill>
-        <p:spPr>
-          <a:xfrm>
-            <a:off x="6862572" y="3086100"/>
-            <a:ext cx="411480" cy="411480"/>
-          </a:xfrm>
-          <a:prstGeom prst="rect">
-            <a:avLst/>
-          </a:prstGeom>
-        </p:spPr>
-      </p:pic>
-      <p:sp>
-        <p:nvSpPr>
-          <p:cNvPr id="14" name="Text 9"/>
-          <p:cNvSpPr/>
-          <p:nvPr/>
-        </p:nvSpPr>
-        <p:spPr>
-          <a:xfrm>
-            <a:off x="6656832" y="3886200"/>
-            <a:ext cx="4434840" cy="457200"/>
-          </a:xfrm>
-          <a:prstGeom prst="rect">
-            <a:avLst/>
-          </a:prstGeom>
-          <a:noFill/>
-          <a:ln/>
-        </p:spPr>
-        <p:txBody>
-          <a:bodyPr wrap="square" lIns="0" tIns="0" rIns="0" bIns="0" rtlCol="0" anchor="ctr"/>
-          <a:lstStyle/>
-          <a:p>
-            <a:pPr indent="0" marL="0">
-              <a:buNone/>
-            </a:pPr>
-            <a:r>
-              <a:rPr lang="en-US" sz="1800" b="1" dirty="0">
-                <a:solidFill>
-                  <a:srgbClr val="F2A93B"/>
-                </a:solidFill>
-                <a:latin typeface="Cambria" pitchFamily="34" charset="0"/>
-                <a:ea typeface="Cambria" pitchFamily="34" charset="-122"/>
-                <a:cs typeface="Cambria" pitchFamily="34" charset="-120"/>
-              </a:rPr>
-              <a:t>ビュッフェでの食育</a:t>
-            </a:r>
-            <a:endParaRPr lang="en-US" sz="1800" dirty="0"/>
-          </a:p>
-        </p:txBody>
-      </p:sp>
-      <p:sp>
-        <p:nvSpPr>
-          <p:cNvPr id="15" name="Text 10"/>
-          <p:cNvSpPr/>
-          <p:nvPr/>
-        </p:nvSpPr>
-        <p:spPr>
-          <a:xfrm>
-            <a:off x="6656832" y="4389120"/>
-            <a:ext cx="4434840" cy="1371600"/>
-          </a:xfrm>
-          <a:prstGeom prst="rect">
-            <a:avLst/>
-          </a:prstGeom>
-          <a:noFill/>
-          <a:ln/>
-        </p:spPr>
-        <p:txBody>
-          <a:bodyPr wrap="square" lIns="0" tIns="0" rIns="0" bIns="0" rtlCol="0" anchor="ctr"/>
-          <a:lstStyle/>
-          <a:p>
-            <a:pPr indent="0" marL="0">
-              <a:lnSpc>
-                <a:spcPts val="2200"/>
-              </a:lnSpc>
-              <a:buNone/>
-            </a:pPr>
-            <a:r>
-              <a:rPr lang="en-US" sz="1350" dirty="0">
-                <a:solidFill>
-                  <a:srgbClr val="FFFFFF"/>
-                </a:solidFill>
-                <a:latin typeface="Calibri" pitchFamily="34" charset="0"/>
-                <a:ea typeface="Calibri" pitchFamily="34" charset="-122"/>
-                <a:cs typeface="Calibri" pitchFamily="34" charset="-120"/>
-              </a:rPr>
-              <a:t>ビュッフェで「何を選べば勝てるか」を選手自身に判断させる指導を行う</a:t>
-            </a:r>
-            <a:endParaRPr lang="en-US" sz="1350" dirty="0"/>
-          </a:p>
-        </p:txBody>
-      </p:sp>
-      <p:sp>
-        <p:nvSpPr>
-          <p:cNvPr id="16" name="Text 11"/>
-          <p:cNvSpPr/>
-          <p:nvPr/>
-        </p:nvSpPr>
-        <p:spPr>
-          <a:xfrm>
-            <a:off x="457200" y="6473952"/>
-            <a:ext cx="7315200" cy="274320"/>
-          </a:xfrm>
-          <a:prstGeom prst="rect">
-            <a:avLst/>
-          </a:prstGeom>
-          <a:noFill/>
-          <a:ln/>
-        </p:spPr>
-        <p:txBody>
-          <a:bodyPr wrap="square" lIns="0" tIns="0" rIns="0" bIns="0" rtlCol="0" anchor="ctr"/>
-          <a:lstStyle/>
-          <a:p>
-            <a:pPr algn="l" indent="0" marL="0">
-              <a:buNone/>
-            </a:pPr>
-            <a:r>
-              <a:rPr lang="en-US" sz="900" dirty="0">
-                <a:solidFill>
-                  <a:srgbClr val="A9B4C4"/>
-                </a:solidFill>
-                <a:latin typeface="Calibri" pitchFamily="34" charset="0"/>
-                <a:ea typeface="Calibri" pitchFamily="34" charset="-122"/>
-                <a:cs typeface="Calibri" pitchFamily="34" charset="-120"/>
-              </a:rPr>
-              <a:t>スポーツ管理栄養士講義 ｜ 協力：スミフルジャパン</a:t>
-            </a:r>
-            <a:endParaRPr lang="en-US" sz="900" dirty="0"/>
-          </a:p>
-        </p:txBody>
-      </p:sp>
-      <p:sp>
-        <p:nvSpPr>
-          <p:cNvPr id="17" name="Text 12"/>
-          <p:cNvSpPr/>
-          <p:nvPr/>
-        </p:nvSpPr>
-        <p:spPr>
-          <a:xfrm>
-            <a:off x="11277295" y="6473952"/>
-            <a:ext cx="548640" cy="274320"/>
-          </a:xfrm>
-          <a:prstGeom prst="rect">
-            <a:avLst/>
-          </a:prstGeom>
-          <a:noFill/>
-          <a:ln/>
-        </p:spPr>
-        <p:txBody>
-          <a:bodyPr wrap="square" lIns="0" tIns="0" rIns="0" bIns="0" rtlCol="0" anchor="ctr"/>
-          <a:lstStyle/>
-          <a:p>
-            <a:pPr algn="r" indent="0" marL="0">
-              <a:buNone/>
-            </a:pPr>
-            <a:r>
-              <a:rPr lang="en-US" sz="900" dirty="0">
-                <a:solidFill>
-                  <a:srgbClr val="A9B4C4"/>
                 </a:solidFill>
                 <a:latin typeface="Calibri" pitchFamily="34" charset="0"/>
                 <a:ea typeface="Calibri" pitchFamily="34" charset="-122"/>
@@ -7076,58 +9160,14 @@
       </p:grpSpPr>
       <p:sp>
         <p:nvSpPr>
-          <p:cNvPr id="2" name="Shape 0"/>
-          <p:cNvSpPr/>
-          <p:nvPr/>
-        </p:nvSpPr>
-        <p:spPr>
-          <a:xfrm>
-            <a:off x="9692640" y="-1828800"/>
-            <a:ext cx="5486400" cy="5486400"/>
-          </a:xfrm>
-          <a:prstGeom prst="ellipse">
-            <a:avLst/>
-          </a:prstGeom>
-          <a:solidFill>
-            <a:srgbClr val="F2A93B">
-              <a:alpha val="10000"/>
-            </a:srgbClr>
-          </a:solidFill>
-          <a:ln/>
-        </p:spPr>
-      </p:sp>
-      <p:sp>
-        <p:nvSpPr>
-          <p:cNvPr id="3" name="Shape 1"/>
-          <p:cNvSpPr/>
-          <p:nvPr/>
-        </p:nvSpPr>
-        <p:spPr>
-          <a:xfrm>
-            <a:off x="-1645920" y="3840480"/>
-            <a:ext cx="3840480" cy="3840480"/>
-          </a:xfrm>
-          <a:prstGeom prst="ellipse">
-            <a:avLst/>
-          </a:prstGeom>
-          <a:solidFill>
-            <a:srgbClr val="7CB518">
-              <a:alpha val="10000"/>
-            </a:srgbClr>
-          </a:solidFill>
-          <a:ln/>
-        </p:spPr>
-      </p:sp>
-      <p:sp>
-        <p:nvSpPr>
-          <p:cNvPr id="4" name="Text 2"/>
-          <p:cNvSpPr/>
-          <p:nvPr/>
-        </p:nvSpPr>
-        <p:spPr>
-          <a:xfrm>
-            <a:off x="731520" y="2331720"/>
-            <a:ext cx="4114800" cy="1828800"/>
+          <p:cNvPr id="2" name="Text 0"/>
+          <p:cNvSpPr/>
+          <p:nvPr/>
+        </p:nvSpPr>
+        <p:spPr>
+          <a:xfrm>
+            <a:off x="731520" y="457200"/>
+            <a:ext cx="10058400" cy="502920"/>
           </a:xfrm>
           <a:prstGeom prst="rect">
             <a:avLst/>
@@ -7143,131 +9183,30 @@
               <a:buNone/>
             </a:pPr>
             <a:r>
-              <a:rPr lang="en-US" sz="11000" b="1" dirty="0">
-                <a:solidFill>
-                  <a:srgbClr val="F2A93B"/>
+              <a:rPr lang="en-US" sz="2200" b="1" dirty="0">
+                <a:solidFill>
+                  <a:srgbClr val="FFFFFF"/>
                 </a:solidFill>
                 <a:latin typeface="Cambria" pitchFamily="34" charset="0"/>
                 <a:ea typeface="Cambria" pitchFamily="34" charset="-122"/>
                 <a:cs typeface="Cambria" pitchFamily="34" charset="-120"/>
               </a:rPr>
-              <a:t>03</a:t>
-            </a:r>
-            <a:endParaRPr lang="en-US" sz="11000" dirty="0"/>
-          </a:p>
-        </p:txBody>
-      </p:sp>
-      <p:sp>
-        <p:nvSpPr>
-          <p:cNvPr id="5" name="Text 3"/>
-          <p:cNvSpPr/>
-          <p:nvPr/>
-        </p:nvSpPr>
-        <p:spPr>
-          <a:xfrm>
-            <a:off x="4160520" y="2788920"/>
-            <a:ext cx="7315200" cy="365760"/>
-          </a:xfrm>
-          <a:prstGeom prst="rect">
-            <a:avLst/>
-          </a:prstGeom>
-          <a:noFill/>
-          <a:ln/>
-        </p:spPr>
-        <p:txBody>
-          <a:bodyPr wrap="square" lIns="0" tIns="0" rIns="0" bIns="0" rtlCol="0" anchor="ctr"/>
-          <a:lstStyle/>
-          <a:p>
-            <a:pPr indent="0" marL="0">
-              <a:buNone/>
-            </a:pPr>
-            <a:r>
-              <a:rPr lang="en-US" sz="1300" b="1" spc="300" kern="0" dirty="0">
-                <a:solidFill>
-                  <a:srgbClr val="F2A93B"/>
-                </a:solidFill>
-                <a:latin typeface="Calibri" pitchFamily="34" charset="0"/>
-                <a:ea typeface="Calibri" pitchFamily="34" charset="-122"/>
-                <a:cs typeface="Calibri" pitchFamily="34" charset="-120"/>
-              </a:rPr>
-              <a:t>CHAPTER THREE</a:t>
-            </a:r>
-            <a:endParaRPr lang="en-US" sz="1300" dirty="0"/>
-          </a:p>
-        </p:txBody>
-      </p:sp>
-      <p:sp>
-        <p:nvSpPr>
-          <p:cNvPr id="6" name="Text 4"/>
-          <p:cNvSpPr/>
-          <p:nvPr/>
-        </p:nvSpPr>
-        <p:spPr>
-          <a:xfrm>
-            <a:off x="4160520" y="3154680"/>
-            <a:ext cx="7315200" cy="1463040"/>
-          </a:xfrm>
-          <a:prstGeom prst="rect">
-            <a:avLst/>
-          </a:prstGeom>
-          <a:noFill/>
-          <a:ln/>
-        </p:spPr>
-        <p:txBody>
-          <a:bodyPr wrap="square" lIns="0" tIns="0" rIns="0" bIns="0" rtlCol="0" anchor="ctr"/>
-          <a:lstStyle/>
-          <a:p>
-            <a:pPr indent="0" marL="0">
-              <a:lnSpc>
-                <a:spcPts val="3800"/>
-              </a:lnSpc>
-              <a:buNone/>
-            </a:pPr>
-            <a:r>
-              <a:rPr lang="en-US" sz="3000" b="1" dirty="0">
-                <a:solidFill>
-                  <a:srgbClr val="FFFFFF"/>
-                </a:solidFill>
-                <a:latin typeface="Cambria" pitchFamily="34" charset="0"/>
-                <a:ea typeface="Cambria" pitchFamily="34" charset="-122"/>
-                <a:cs typeface="Cambria" pitchFamily="34" charset="-120"/>
-              </a:rPr>
-              <a:t>今日からできる！</a:t>
-            </a:r>
-            <a:endParaRPr lang="en-US" sz="3000" dirty="0"/>
-          </a:p>
-          <a:p>
-            <a:pPr indent="0" marL="0">
-              <a:lnSpc>
-                <a:spcPts val="3800"/>
-              </a:lnSpc>
-              <a:buNone/>
-            </a:pPr>
-            <a:r>
-              <a:rPr lang="en-US" sz="3000" b="1" dirty="0">
-                <a:solidFill>
-                  <a:srgbClr val="FFFFFF"/>
-                </a:solidFill>
-                <a:latin typeface="Cambria" pitchFamily="34" charset="0"/>
-                <a:ea typeface="Cambria" pitchFamily="34" charset="-122"/>
-                <a:cs typeface="Cambria" pitchFamily="34" charset="-120"/>
-              </a:rPr>
-              <a:t>パフォーマンスを高める基本の食事</a:t>
-            </a:r>
-            <a:endParaRPr lang="en-US" sz="3000" dirty="0"/>
-          </a:p>
-        </p:txBody>
-      </p:sp>
-      <p:sp>
-        <p:nvSpPr>
-          <p:cNvPr id="7" name="Shape 5"/>
-          <p:cNvSpPr/>
-          <p:nvPr/>
-        </p:nvSpPr>
-        <p:spPr>
-          <a:xfrm>
-            <a:off x="4206240" y="4709160"/>
-            <a:ext cx="822960" cy="822960"/>
+              <a:t>事例②　海外遠征・ホテル生活での食環境づくり</a:t>
+            </a:r>
+            <a:endParaRPr lang="en-US" sz="2200" dirty="0"/>
+          </a:p>
+        </p:txBody>
+      </p:sp>
+      <p:sp>
+        <p:nvSpPr>
+          <p:cNvPr id="3" name="Shape 1"/>
+          <p:cNvSpPr/>
+          <p:nvPr/>
+        </p:nvSpPr>
+        <p:spPr>
+          <a:xfrm>
+            <a:off x="731520" y="1234440"/>
+            <a:ext cx="914400" cy="914400"/>
           </a:xfrm>
           <a:prstGeom prst="ellipse">
             <a:avLst/>
@@ -7280,7 +9219,7 @@
       </p:sp>
       <p:pic>
         <p:nvPicPr>
-          <p:cNvPr id="8" name="Image 0" descr="preencoded.png">    </p:cNvPr>
+          <p:cNvPr id="4" name="Image 0" descr="preencoded.png">    </p:cNvPr>
           <p:cNvPicPr>
             <a:picLocks noChangeAspect="1"/>
           </p:cNvPicPr>
@@ -7294,7 +9233,120 @@
         </p:blipFill>
         <p:spPr>
           <a:xfrm>
-            <a:off x="4411980" y="4914900"/>
+            <a:off x="960120" y="1463040"/>
+            <a:ext cx="457200" cy="457200"/>
+          </a:xfrm>
+          <a:prstGeom prst="rect">
+            <a:avLst/>
+          </a:prstGeom>
+        </p:spPr>
+      </p:pic>
+      <p:sp>
+        <p:nvSpPr>
+          <p:cNvPr id="5" name="Text 2"/>
+          <p:cNvSpPr/>
+          <p:nvPr/>
+        </p:nvSpPr>
+        <p:spPr>
+          <a:xfrm>
+            <a:off x="1874520" y="1234440"/>
+            <a:ext cx="9418320" cy="914400"/>
+          </a:xfrm>
+          <a:prstGeom prst="rect">
+            <a:avLst/>
+          </a:prstGeom>
+          <a:noFill/>
+          <a:ln/>
+        </p:spPr>
+        <p:txBody>
+          <a:bodyPr wrap="square" lIns="0" tIns="0" rIns="0" bIns="0" rtlCol="0" anchor="ctr"/>
+          <a:lstStyle/>
+          <a:p>
+            <a:pPr indent="0" marL="0">
+              <a:lnSpc>
+                <a:spcPts val="2200"/>
+              </a:lnSpc>
+              <a:buNone/>
+            </a:pPr>
+            <a:r>
+              <a:rPr lang="en-US" sz="1500" dirty="0">
+                <a:solidFill>
+                  <a:srgbClr val="D8DEE9"/>
+                </a:solidFill>
+                <a:latin typeface="Calibri" pitchFamily="34" charset="0"/>
+                <a:ea typeface="Calibri" pitchFamily="34" charset="-122"/>
+                <a:cs typeface="Calibri" pitchFamily="34" charset="-120"/>
+              </a:rPr>
+              <a:t>海外遠征では、現地の食事が合わずに体重やパフォーマンスが落ちてしまう選手が少なくありません。</a:t>
+            </a:r>
+            <a:endParaRPr lang="en-US" sz="1500" dirty="0"/>
+          </a:p>
+        </p:txBody>
+      </p:sp>
+      <p:sp>
+        <p:nvSpPr>
+          <p:cNvPr id="6" name="Shape 3"/>
+          <p:cNvSpPr/>
+          <p:nvPr/>
+        </p:nvSpPr>
+        <p:spPr>
+          <a:xfrm>
+            <a:off x="731520" y="2514600"/>
+            <a:ext cx="5166360" cy="3383280"/>
+          </a:xfrm>
+          <a:prstGeom prst="roundRect">
+            <a:avLst>
+              <a:gd name="adj" fmla="val 3243"/>
+            </a:avLst>
+          </a:prstGeom>
+          <a:solidFill>
+            <a:srgbClr val="0D1F35"/>
+          </a:solidFill>
+          <a:ln w="12700">
+            <a:solidFill>
+              <a:srgbClr val="2B4562"/>
+            </a:solidFill>
+            <a:prstDash val="solid"/>
+          </a:ln>
+        </p:spPr>
+      </p:sp>
+      <p:sp>
+        <p:nvSpPr>
+          <p:cNvPr id="7" name="Shape 4"/>
+          <p:cNvSpPr/>
+          <p:nvPr/>
+        </p:nvSpPr>
+        <p:spPr>
+          <a:xfrm>
+            <a:off x="1097280" y="2880360"/>
+            <a:ext cx="822960" cy="822960"/>
+          </a:xfrm>
+          <a:prstGeom prst="ellipse">
+            <a:avLst/>
+          </a:prstGeom>
+          <a:solidFill>
+            <a:srgbClr val="F2A93B"/>
+          </a:solidFill>
+          <a:ln/>
+        </p:spPr>
+      </p:sp>
+      <p:pic>
+        <p:nvPicPr>
+          <p:cNvPr id="8" name="Image 1" descr="preencoded.png">    </p:cNvPr>
+          <p:cNvPicPr>
+            <a:picLocks noChangeAspect="1"/>
+          </p:cNvPicPr>
+          <p:nvPr/>
+        </p:nvPicPr>
+        <p:blipFill>
+          <a:blip r:embed="rId2"/>
+          <a:stretch>
+            <a:fillRect/>
+          </a:stretch>
+        </p:blipFill>
+        <p:spPr>
+          <a:xfrm>
+            <a:off x="1303020" y="3086100"/>
             <a:ext cx="411480" cy="411480"/>
           </a:xfrm>
           <a:prstGeom prst="rect">
@@ -7302,6 +9354,317 @@
           </a:prstGeom>
         </p:spPr>
       </p:pic>
+      <p:sp>
+        <p:nvSpPr>
+          <p:cNvPr id="9" name="Text 5"/>
+          <p:cNvSpPr/>
+          <p:nvPr/>
+        </p:nvSpPr>
+        <p:spPr>
+          <a:xfrm>
+            <a:off x="1097280" y="3886200"/>
+            <a:ext cx="4434840" cy="457200"/>
+          </a:xfrm>
+          <a:prstGeom prst="rect">
+            <a:avLst/>
+          </a:prstGeom>
+          <a:noFill/>
+          <a:ln/>
+        </p:spPr>
+        <p:txBody>
+          <a:bodyPr wrap="square" lIns="0" tIns="0" rIns="0" bIns="0" rtlCol="0" anchor="ctr"/>
+          <a:lstStyle/>
+          <a:p>
+            <a:pPr indent="0" marL="0">
+              <a:buNone/>
+            </a:pPr>
+            <a:r>
+              <a:rPr lang="en-US" sz="1800" b="1" dirty="0">
+                <a:solidFill>
+                  <a:srgbClr val="F2A93B"/>
+                </a:solidFill>
+                <a:latin typeface="Cambria" pitchFamily="34" charset="0"/>
+                <a:ea typeface="Cambria" pitchFamily="34" charset="-122"/>
+                <a:cs typeface="Cambria" pitchFamily="34" charset="-120"/>
+              </a:rPr>
+              <a:t>シェフとの交渉</a:t>
+            </a:r>
+            <a:endParaRPr lang="en-US" sz="1800" dirty="0"/>
+          </a:p>
+        </p:txBody>
+      </p:sp>
+      <p:sp>
+        <p:nvSpPr>
+          <p:cNvPr id="10" name="Text 6"/>
+          <p:cNvSpPr/>
+          <p:nvPr/>
+        </p:nvSpPr>
+        <p:spPr>
+          <a:xfrm>
+            <a:off x="1097280" y="4389120"/>
+            <a:ext cx="4434840" cy="1371600"/>
+          </a:xfrm>
+          <a:prstGeom prst="rect">
+            <a:avLst/>
+          </a:prstGeom>
+          <a:noFill/>
+          <a:ln/>
+        </p:spPr>
+        <p:txBody>
+          <a:bodyPr wrap="square" lIns="0" tIns="0" rIns="0" bIns="0" rtlCol="0" anchor="ctr"/>
+          <a:lstStyle/>
+          <a:p>
+            <a:pPr indent="0" marL="0">
+              <a:lnSpc>
+                <a:spcPts val="2200"/>
+              </a:lnSpc>
+              <a:buNone/>
+            </a:pPr>
+            <a:r>
+              <a:rPr lang="en-US" sz="1350" dirty="0">
+                <a:solidFill>
+                  <a:srgbClr val="FFFFFF"/>
+                </a:solidFill>
+                <a:latin typeface="Calibri" pitchFamily="34" charset="0"/>
+                <a:ea typeface="Calibri" pitchFamily="34" charset="-122"/>
+                <a:cs typeface="Calibri" pitchFamily="34" charset="-120"/>
+              </a:rPr>
+              <a:t>管理栄養士が現地に同行し、ホテルのシェフと交渉して日本食に近いメニューを作ってもらう</a:t>
+            </a:r>
+            <a:endParaRPr lang="en-US" sz="1350" dirty="0"/>
+          </a:p>
+        </p:txBody>
+      </p:sp>
+      <p:sp>
+        <p:nvSpPr>
+          <p:cNvPr id="11" name="Shape 7"/>
+          <p:cNvSpPr/>
+          <p:nvPr/>
+        </p:nvSpPr>
+        <p:spPr>
+          <a:xfrm>
+            <a:off x="6291072" y="2514600"/>
+            <a:ext cx="5166360" cy="3383280"/>
+          </a:xfrm>
+          <a:prstGeom prst="roundRect">
+            <a:avLst>
+              <a:gd name="adj" fmla="val 3243"/>
+            </a:avLst>
+          </a:prstGeom>
+          <a:solidFill>
+            <a:srgbClr val="0D1F35"/>
+          </a:solidFill>
+          <a:ln w="12700">
+            <a:solidFill>
+              <a:srgbClr val="2B4562"/>
+            </a:solidFill>
+            <a:prstDash val="solid"/>
+          </a:ln>
+        </p:spPr>
+      </p:sp>
+      <p:sp>
+        <p:nvSpPr>
+          <p:cNvPr id="12" name="Shape 8"/>
+          <p:cNvSpPr/>
+          <p:nvPr/>
+        </p:nvSpPr>
+        <p:spPr>
+          <a:xfrm>
+            <a:off x="6656832" y="2880360"/>
+            <a:ext cx="822960" cy="822960"/>
+          </a:xfrm>
+          <a:prstGeom prst="ellipse">
+            <a:avLst/>
+          </a:prstGeom>
+          <a:solidFill>
+            <a:srgbClr val="F2A93B"/>
+          </a:solidFill>
+          <a:ln/>
+        </p:spPr>
+      </p:sp>
+      <p:pic>
+        <p:nvPicPr>
+          <p:cNvPr id="13" name="Image 2" descr="preencoded.png">    </p:cNvPr>
+          <p:cNvPicPr>
+            <a:picLocks noChangeAspect="1"/>
+          </p:cNvPicPr>
+          <p:nvPr/>
+        </p:nvPicPr>
+        <p:blipFill>
+          <a:blip r:embed="rId3"/>
+          <a:stretch>
+            <a:fillRect/>
+          </a:stretch>
+        </p:blipFill>
+        <p:spPr>
+          <a:xfrm>
+            <a:off x="6862572" y="3086100"/>
+            <a:ext cx="411480" cy="411480"/>
+          </a:xfrm>
+          <a:prstGeom prst="rect">
+            <a:avLst/>
+          </a:prstGeom>
+        </p:spPr>
+      </p:pic>
+      <p:sp>
+        <p:nvSpPr>
+          <p:cNvPr id="14" name="Text 9"/>
+          <p:cNvSpPr/>
+          <p:nvPr/>
+        </p:nvSpPr>
+        <p:spPr>
+          <a:xfrm>
+            <a:off x="6656832" y="3886200"/>
+            <a:ext cx="4434840" cy="457200"/>
+          </a:xfrm>
+          <a:prstGeom prst="rect">
+            <a:avLst/>
+          </a:prstGeom>
+          <a:noFill/>
+          <a:ln/>
+        </p:spPr>
+        <p:txBody>
+          <a:bodyPr wrap="square" lIns="0" tIns="0" rIns="0" bIns="0" rtlCol="0" anchor="ctr"/>
+          <a:lstStyle/>
+          <a:p>
+            <a:pPr indent="0" marL="0">
+              <a:buNone/>
+            </a:pPr>
+            <a:r>
+              <a:rPr lang="en-US" sz="1800" b="1" dirty="0">
+                <a:solidFill>
+                  <a:srgbClr val="F2A93B"/>
+                </a:solidFill>
+                <a:latin typeface="Cambria" pitchFamily="34" charset="0"/>
+                <a:ea typeface="Cambria" pitchFamily="34" charset="-122"/>
+                <a:cs typeface="Cambria" pitchFamily="34" charset="-120"/>
+              </a:rPr>
+              <a:t>ビュッフェでの食育</a:t>
+            </a:r>
+            <a:endParaRPr lang="en-US" sz="1800" dirty="0"/>
+          </a:p>
+        </p:txBody>
+      </p:sp>
+      <p:sp>
+        <p:nvSpPr>
+          <p:cNvPr id="15" name="Text 10"/>
+          <p:cNvSpPr/>
+          <p:nvPr/>
+        </p:nvSpPr>
+        <p:spPr>
+          <a:xfrm>
+            <a:off x="6656832" y="4389120"/>
+            <a:ext cx="4434840" cy="1371600"/>
+          </a:xfrm>
+          <a:prstGeom prst="rect">
+            <a:avLst/>
+          </a:prstGeom>
+          <a:noFill/>
+          <a:ln/>
+        </p:spPr>
+        <p:txBody>
+          <a:bodyPr wrap="square" lIns="0" tIns="0" rIns="0" bIns="0" rtlCol="0" anchor="ctr"/>
+          <a:lstStyle/>
+          <a:p>
+            <a:pPr indent="0" marL="0">
+              <a:lnSpc>
+                <a:spcPts val="2200"/>
+              </a:lnSpc>
+              <a:buNone/>
+            </a:pPr>
+            <a:r>
+              <a:rPr lang="en-US" sz="1350" dirty="0">
+                <a:solidFill>
+                  <a:srgbClr val="FFFFFF"/>
+                </a:solidFill>
+                <a:latin typeface="Calibri" pitchFamily="34" charset="0"/>
+                <a:ea typeface="Calibri" pitchFamily="34" charset="-122"/>
+                <a:cs typeface="Calibri" pitchFamily="34" charset="-120"/>
+              </a:rPr>
+              <a:t>ビュッフェで「何を選べば勝てるか」を選手自身に判断させる指導を行う</a:t>
+            </a:r>
+            <a:endParaRPr lang="en-US" sz="1350" dirty="0"/>
+          </a:p>
+        </p:txBody>
+      </p:sp>
+      <p:sp>
+        <p:nvSpPr>
+          <p:cNvPr id="16" name="Text 11"/>
+          <p:cNvSpPr/>
+          <p:nvPr/>
+        </p:nvSpPr>
+        <p:spPr>
+          <a:xfrm>
+            <a:off x="457200" y="6473952"/>
+            <a:ext cx="7315200" cy="274320"/>
+          </a:xfrm>
+          <a:prstGeom prst="rect">
+            <a:avLst/>
+          </a:prstGeom>
+          <a:noFill/>
+          <a:ln/>
+        </p:spPr>
+        <p:txBody>
+          <a:bodyPr wrap="square" lIns="0" tIns="0" rIns="0" bIns="0" rtlCol="0" anchor="ctr"/>
+          <a:lstStyle/>
+          <a:p>
+            <a:pPr algn="l" indent="0" marL="0">
+              <a:buNone/>
+            </a:pPr>
+            <a:r>
+              <a:rPr lang="en-US" sz="900" dirty="0">
+                <a:solidFill>
+                  <a:srgbClr val="A9B4C4"/>
+                </a:solidFill>
+                <a:latin typeface="Calibri" pitchFamily="34" charset="0"/>
+                <a:ea typeface="Calibri" pitchFamily="34" charset="-122"/>
+                <a:cs typeface="Calibri" pitchFamily="34" charset="-120"/>
+              </a:rPr>
+              <a:t>スポーツ管理栄養士講義 ｜ 協力：スミフルジャパン</a:t>
+            </a:r>
+            <a:endParaRPr lang="en-US" sz="900" dirty="0"/>
+          </a:p>
+        </p:txBody>
+      </p:sp>
+      <p:sp>
+        <p:nvSpPr>
+          <p:cNvPr id="17" name="Text 12"/>
+          <p:cNvSpPr/>
+          <p:nvPr/>
+        </p:nvSpPr>
+        <p:spPr>
+          <a:xfrm>
+            <a:off x="11277295" y="6473952"/>
+            <a:ext cx="548640" cy="274320"/>
+          </a:xfrm>
+          <a:prstGeom prst="rect">
+            <a:avLst/>
+          </a:prstGeom>
+          <a:noFill/>
+          <a:ln/>
+        </p:spPr>
+        <p:txBody>
+          <a:bodyPr wrap="square" lIns="0" tIns="0" rIns="0" bIns="0" rtlCol="0" anchor="ctr"/>
+          <a:lstStyle/>
+          <a:p>
+            <a:pPr algn="r" indent="0" marL="0">
+              <a:buNone/>
+            </a:pPr>
+            <a:r>
+              <a:rPr lang="en-US" sz="900" dirty="0">
+                <a:solidFill>
+                  <a:srgbClr val="A9B4C4"/>
+                </a:solidFill>
+                <a:latin typeface="Calibri" pitchFamily="34" charset="0"/>
+                <a:ea typeface="Calibri" pitchFamily="34" charset="-122"/>
+                <a:cs typeface="Calibri" pitchFamily="34" charset="-120"/>
+              </a:rPr>
+              <a:t>08</a:t>
+            </a:r>
+            <a:endParaRPr lang="en-US" sz="900" dirty="0"/>
+          </a:p>
+        </p:txBody>
+      </p:sp>
     </p:spTree>
   </p:cSld>
   <p:clrMapOvr>
@@ -7316,7 +9679,7 @@
     <p:bg>
       <p:bgPr>
         <a:solidFill>
-          <a:srgbClr val="FFFFFF"/>
+          <a:srgbClr val="132A46"/>
         </a:solidFill>
       </p:bgPr>
     </p:bg>
@@ -7336,14 +9699,58 @@
       </p:grpSpPr>
       <p:sp>
         <p:nvSpPr>
-          <p:cNvPr id="2" name="Text 0"/>
-          <p:cNvSpPr/>
-          <p:nvPr/>
-        </p:nvSpPr>
-        <p:spPr>
-          <a:xfrm>
-            <a:off x="731520" y="457200"/>
-            <a:ext cx="9144000" cy="502920"/>
+          <p:cNvPr id="2" name="Shape 0"/>
+          <p:cNvSpPr/>
+          <p:nvPr/>
+        </p:nvSpPr>
+        <p:spPr>
+          <a:xfrm>
+            <a:off x="9692640" y="-1828800"/>
+            <a:ext cx="5486400" cy="5486400"/>
+          </a:xfrm>
+          <a:prstGeom prst="ellipse">
+            <a:avLst/>
+          </a:prstGeom>
+          <a:solidFill>
+            <a:srgbClr val="F2A93B">
+              <a:alpha val="10000"/>
+            </a:srgbClr>
+          </a:solidFill>
+          <a:ln/>
+        </p:spPr>
+      </p:sp>
+      <p:sp>
+        <p:nvSpPr>
+          <p:cNvPr id="3" name="Shape 1"/>
+          <p:cNvSpPr/>
+          <p:nvPr/>
+        </p:nvSpPr>
+        <p:spPr>
+          <a:xfrm>
+            <a:off x="-1645920" y="3840480"/>
+            <a:ext cx="3840480" cy="3840480"/>
+          </a:xfrm>
+          <a:prstGeom prst="ellipse">
+            <a:avLst/>
+          </a:prstGeom>
+          <a:solidFill>
+            <a:srgbClr val="7CB518">
+              <a:alpha val="10000"/>
+            </a:srgbClr>
+          </a:solidFill>
+          <a:ln/>
+        </p:spPr>
+      </p:sp>
+      <p:sp>
+        <p:nvSpPr>
+          <p:cNvPr id="4" name="Text 2"/>
+          <p:cNvSpPr/>
+          <p:nvPr/>
+        </p:nvSpPr>
+        <p:spPr>
+          <a:xfrm>
+            <a:off x="731520" y="2331720"/>
+            <a:ext cx="4114800" cy="1828800"/>
           </a:xfrm>
           <a:prstGeom prst="rect">
             <a:avLst/>
@@ -7359,30 +9766,30 @@
               <a:buNone/>
             </a:pPr>
             <a:r>
-              <a:rPr lang="en-US" sz="2600" b="1" dirty="0">
-                <a:solidFill>
-                  <a:srgbClr val="132A46"/>
+              <a:rPr lang="en-US" sz="11000" b="1" dirty="0">
+                <a:solidFill>
+                  <a:srgbClr val="F2A93B"/>
                 </a:solidFill>
                 <a:latin typeface="Cambria" pitchFamily="34" charset="0"/>
                 <a:ea typeface="Cambria" pitchFamily="34" charset="-122"/>
                 <a:cs typeface="Cambria" pitchFamily="34" charset="-120"/>
               </a:rPr>
-              <a:t>強さを生み出す「5つの皿」</a:t>
-            </a:r>
-            <a:endParaRPr lang="en-US" sz="2600" dirty="0"/>
-          </a:p>
-        </p:txBody>
-      </p:sp>
-      <p:sp>
-        <p:nvSpPr>
-          <p:cNvPr id="3" name="Text 1"/>
-          <p:cNvSpPr/>
-          <p:nvPr/>
-        </p:nvSpPr>
-        <p:spPr>
-          <a:xfrm>
-            <a:off x="731520" y="960120"/>
-            <a:ext cx="9144000" cy="365760"/>
+              <a:t>03</a:t>
+            </a:r>
+            <a:endParaRPr lang="en-US" sz="11000" dirty="0"/>
+          </a:p>
+        </p:txBody>
+      </p:sp>
+      <p:sp>
+        <p:nvSpPr>
+          <p:cNvPr id="5" name="Text 3"/>
+          <p:cNvSpPr/>
+          <p:nvPr/>
+        </p:nvSpPr>
+        <p:spPr>
+          <a:xfrm>
+            <a:off x="4160520" y="2788920"/>
+            <a:ext cx="7315200" cy="365760"/>
           </a:xfrm>
           <a:prstGeom prst="rect">
             <a:avLst/>
@@ -7398,15 +9805,15 @@
               <a:buNone/>
             </a:pPr>
             <a:r>
-              <a:rPr lang="en-US" sz="1300" dirty="0">
-                <a:solidFill>
-                  <a:srgbClr val="5B6472"/>
+              <a:rPr lang="en-US" sz="1300" b="1" spc="300" kern="0" dirty="0">
+                <a:solidFill>
+                  <a:srgbClr val="F2A93B"/>
                 </a:solidFill>
                 <a:latin typeface="Calibri" pitchFamily="34" charset="0"/>
                 <a:ea typeface="Calibri" pitchFamily="34" charset="-122"/>
                 <a:cs typeface="Calibri" pitchFamily="34" charset="-120"/>
               </a:rPr>
-              <a:t>毎食このバランスを意識するだけで、カラダは変わる</a:t>
+              <a:t>CHAPTER THREE</a:t>
             </a:r>
             <a:endParaRPr lang="en-US" sz="1300" dirty="0"/>
           </a:p>
@@ -7414,36 +9821,76 @@
       </p:sp>
       <p:sp>
         <p:nvSpPr>
-          <p:cNvPr id="4" name="Shape 2"/>
-          <p:cNvSpPr/>
-          <p:nvPr/>
-        </p:nvSpPr>
-        <p:spPr>
-          <a:xfrm>
-            <a:off x="778612" y="1691640"/>
-            <a:ext cx="1965960" cy="2880360"/>
-          </a:xfrm>
-          <a:prstGeom prst="roundRect">
-            <a:avLst>
-              <a:gd name="adj" fmla="val 5581"/>
-            </a:avLst>
-          </a:prstGeom>
-          <a:solidFill>
-            <a:srgbClr val="132A46"/>
-          </a:solidFill>
-          <a:ln/>
-        </p:spPr>
-      </p:sp>
-      <p:sp>
-        <p:nvSpPr>
-          <p:cNvPr id="5" name="Shape 3"/>
-          <p:cNvSpPr/>
-          <p:nvPr/>
-        </p:nvSpPr>
-        <p:spPr>
-          <a:xfrm>
-            <a:off x="1304392" y="2011680"/>
-            <a:ext cx="914400" cy="914400"/>
+          <p:cNvPr id="6" name="Text 4"/>
+          <p:cNvSpPr/>
+          <p:nvPr/>
+        </p:nvSpPr>
+        <p:spPr>
+          <a:xfrm>
+            <a:off x="4160520" y="3154680"/>
+            <a:ext cx="7315200" cy="1463040"/>
+          </a:xfrm>
+          <a:prstGeom prst="rect">
+            <a:avLst/>
+          </a:prstGeom>
+          <a:noFill/>
+          <a:ln/>
+        </p:spPr>
+        <p:txBody>
+          <a:bodyPr wrap="square" lIns="0" tIns="0" rIns="0" bIns="0" rtlCol="0" anchor="ctr"/>
+          <a:lstStyle/>
+          <a:p>
+            <a:pPr indent="0" marL="0">
+              <a:lnSpc>
+                <a:spcPts val="3800"/>
+              </a:lnSpc>
+              <a:buNone/>
+            </a:pPr>
+            <a:r>
+              <a:rPr lang="en-US" sz="3000" b="1" dirty="0">
+                <a:solidFill>
+                  <a:srgbClr val="FFFFFF"/>
+                </a:solidFill>
+                <a:latin typeface="Cambria" pitchFamily="34" charset="0"/>
+                <a:ea typeface="Cambria" pitchFamily="34" charset="-122"/>
+                <a:cs typeface="Cambria" pitchFamily="34" charset="-120"/>
+              </a:rPr>
+              <a:t>今日からできる！</a:t>
+            </a:r>
+            <a:endParaRPr lang="en-US" sz="3000" dirty="0"/>
+          </a:p>
+          <a:p>
+            <a:pPr indent="0" marL="0">
+              <a:lnSpc>
+                <a:spcPts val="3800"/>
+              </a:lnSpc>
+              <a:buNone/>
+            </a:pPr>
+            <a:r>
+              <a:rPr lang="en-US" sz="3000" b="1" dirty="0">
+                <a:solidFill>
+                  <a:srgbClr val="FFFFFF"/>
+                </a:solidFill>
+                <a:latin typeface="Cambria" pitchFamily="34" charset="0"/>
+                <a:ea typeface="Cambria" pitchFamily="34" charset="-122"/>
+                <a:cs typeface="Cambria" pitchFamily="34" charset="-120"/>
+              </a:rPr>
+              <a:t>パフォーマンスを高める基本の食事</a:t>
+            </a:r>
+            <a:endParaRPr lang="en-US" sz="3000" dirty="0"/>
+          </a:p>
+        </p:txBody>
+      </p:sp>
+      <p:sp>
+        <p:nvSpPr>
+          <p:cNvPr id="7" name="Shape 5"/>
+          <p:cNvSpPr/>
+          <p:nvPr/>
+        </p:nvSpPr>
+        <p:spPr>
+          <a:xfrm>
+            <a:off x="4206240" y="4709160"/>
+            <a:ext cx="822960" cy="822960"/>
           </a:xfrm>
           <a:prstGeom prst="ellipse">
             <a:avLst/>
@@ -7456,7 +9903,7 @@
       </p:sp>
       <p:pic>
         <p:nvPicPr>
-          <p:cNvPr id="6" name="Image 0" descr="preencoded.png">    </p:cNvPr>
+          <p:cNvPr id="8" name="Image 0" descr="preencoded.png">    </p:cNvPr>
           <p:cNvPicPr>
             <a:picLocks noChangeAspect="1"/>
           </p:cNvPicPr>
@@ -7470,1049 +9917,14 @@
         </p:blipFill>
         <p:spPr>
           <a:xfrm>
-            <a:off x="1510132" y="2217420"/>
-            <a:ext cx="502920" cy="502920"/>
+            <a:off x="4411980" y="4914900"/>
+            <a:ext cx="411480" cy="411480"/>
           </a:xfrm>
           <a:prstGeom prst="rect">
             <a:avLst/>
           </a:prstGeom>
         </p:spPr>
       </p:pic>
-      <p:sp>
-        <p:nvSpPr>
-          <p:cNvPr id="7" name="Text 4"/>
-          <p:cNvSpPr/>
-          <p:nvPr/>
-        </p:nvSpPr>
-        <p:spPr>
-          <a:xfrm>
-            <a:off x="778612" y="3154680"/>
-            <a:ext cx="1965960" cy="411480"/>
-          </a:xfrm>
-          <a:prstGeom prst="rect">
-            <a:avLst/>
-          </a:prstGeom>
-          <a:noFill/>
-          <a:ln/>
-        </p:spPr>
-        <p:txBody>
-          <a:bodyPr wrap="square" lIns="0" tIns="0" rIns="0" bIns="0" rtlCol="0" anchor="ctr"/>
-          <a:lstStyle/>
-          <a:p>
-            <a:pPr algn="ctr" indent="0" marL="0">
-              <a:buNone/>
-            </a:pPr>
-            <a:r>
-              <a:rPr lang="en-US" sz="1800" b="1" dirty="0">
-                <a:solidFill>
-                  <a:srgbClr val="FFFFFF"/>
-                </a:solidFill>
-                <a:latin typeface="Cambria" pitchFamily="34" charset="0"/>
-                <a:ea typeface="Cambria" pitchFamily="34" charset="-122"/>
-                <a:cs typeface="Cambria" pitchFamily="34" charset="-120"/>
-              </a:rPr>
-              <a:t>主食</a:t>
-            </a:r>
-            <a:endParaRPr lang="en-US" sz="1800" dirty="0"/>
-          </a:p>
-        </p:txBody>
-      </p:sp>
-      <p:sp>
-        <p:nvSpPr>
-          <p:cNvPr id="8" name="Text 5"/>
-          <p:cNvSpPr/>
-          <p:nvPr/>
-        </p:nvSpPr>
-        <p:spPr>
-          <a:xfrm>
-            <a:off x="778612" y="3657600"/>
-            <a:ext cx="1965960" cy="365760"/>
-          </a:xfrm>
-          <a:prstGeom prst="rect">
-            <a:avLst/>
-          </a:prstGeom>
-          <a:noFill/>
-          <a:ln/>
-        </p:spPr>
-        <p:txBody>
-          <a:bodyPr wrap="square" lIns="0" tIns="0" rIns="0" bIns="0" rtlCol="0" anchor="ctr"/>
-          <a:lstStyle/>
-          <a:p>
-            <a:pPr algn="ctr" indent="0" marL="0">
-              <a:buNone/>
-            </a:pPr>
-            <a:r>
-              <a:rPr lang="en-US" sz="1250" dirty="0">
-                <a:solidFill>
-                  <a:srgbClr val="C7D0DE"/>
-                </a:solidFill>
-                <a:latin typeface="Calibri" pitchFamily="34" charset="0"/>
-                <a:ea typeface="Calibri" pitchFamily="34" charset="-122"/>
-                <a:cs typeface="Calibri" pitchFamily="34" charset="-120"/>
-              </a:rPr>
-              <a:t>エネルギー</a:t>
-            </a:r>
-            <a:endParaRPr lang="en-US" sz="1250" dirty="0"/>
-          </a:p>
-        </p:txBody>
-      </p:sp>
-      <p:sp>
-        <p:nvSpPr>
-          <p:cNvPr id="9" name="Text 6"/>
-          <p:cNvSpPr/>
-          <p:nvPr/>
-        </p:nvSpPr>
-        <p:spPr>
-          <a:xfrm>
-            <a:off x="888340" y="1764792"/>
-            <a:ext cx="457200" cy="365760"/>
-          </a:xfrm>
-          <a:prstGeom prst="rect">
-            <a:avLst/>
-          </a:prstGeom>
-          <a:noFill/>
-          <a:ln/>
-        </p:spPr>
-        <p:txBody>
-          <a:bodyPr wrap="square" lIns="0" tIns="0" rIns="0" bIns="0" rtlCol="0" anchor="ctr"/>
-          <a:lstStyle/>
-          <a:p>
-            <a:pPr indent="0" marL="0">
-              <a:buNone/>
-            </a:pPr>
-            <a:r>
-              <a:rPr lang="en-US" sz="1300" b="1" dirty="0">
-                <a:solidFill>
-                  <a:srgbClr val="FFFFFF"/>
-                </a:solidFill>
-                <a:latin typeface="Cambria" pitchFamily="34" charset="0"/>
-                <a:ea typeface="Cambria" pitchFamily="34" charset="-122"/>
-                <a:cs typeface="Cambria" pitchFamily="34" charset="-120"/>
-              </a:rPr>
-              <a:t>1</a:t>
-            </a:r>
-            <a:endParaRPr lang="en-US" sz="1300" dirty="0"/>
-          </a:p>
-        </p:txBody>
-      </p:sp>
-      <p:sp>
-        <p:nvSpPr>
-          <p:cNvPr id="10" name="Shape 7"/>
-          <p:cNvSpPr/>
-          <p:nvPr/>
-        </p:nvSpPr>
-        <p:spPr>
-          <a:xfrm>
-            <a:off x="2945740" y="1691640"/>
-            <a:ext cx="1965960" cy="2880360"/>
-          </a:xfrm>
-          <a:prstGeom prst="roundRect">
-            <a:avLst>
-              <a:gd name="adj" fmla="val 5581"/>
-            </a:avLst>
-          </a:prstGeom>
-          <a:solidFill>
-            <a:srgbClr val="132A46"/>
-          </a:solidFill>
-          <a:ln/>
-        </p:spPr>
-      </p:sp>
-      <p:sp>
-        <p:nvSpPr>
-          <p:cNvPr id="11" name="Shape 8"/>
-          <p:cNvSpPr/>
-          <p:nvPr/>
-        </p:nvSpPr>
-        <p:spPr>
-          <a:xfrm>
-            <a:off x="3471520" y="2011680"/>
-            <a:ext cx="914400" cy="914400"/>
-          </a:xfrm>
-          <a:prstGeom prst="ellipse">
-            <a:avLst/>
-          </a:prstGeom>
-          <a:solidFill>
-            <a:srgbClr val="F2A93B"/>
-          </a:solidFill>
-          <a:ln/>
-        </p:spPr>
-      </p:sp>
-      <p:pic>
-        <p:nvPicPr>
-          <p:cNvPr id="12" name="Image 1" descr="preencoded.png">    </p:cNvPr>
-          <p:cNvPicPr>
-            <a:picLocks noChangeAspect="1"/>
-          </p:cNvPicPr>
-          <p:nvPr/>
-        </p:nvPicPr>
-        <p:blipFill>
-          <a:blip r:embed="rId2"/>
-          <a:stretch>
-            <a:fillRect/>
-          </a:stretch>
-        </p:blipFill>
-        <p:spPr>
-          <a:xfrm>
-            <a:off x="3677260" y="2217420"/>
-            <a:ext cx="502920" cy="502920"/>
-          </a:xfrm>
-          <a:prstGeom prst="rect">
-            <a:avLst/>
-          </a:prstGeom>
-        </p:spPr>
-      </p:pic>
-      <p:sp>
-        <p:nvSpPr>
-          <p:cNvPr id="13" name="Text 9"/>
-          <p:cNvSpPr/>
-          <p:nvPr/>
-        </p:nvSpPr>
-        <p:spPr>
-          <a:xfrm>
-            <a:off x="2945740" y="3154680"/>
-            <a:ext cx="1965960" cy="411480"/>
-          </a:xfrm>
-          <a:prstGeom prst="rect">
-            <a:avLst/>
-          </a:prstGeom>
-          <a:noFill/>
-          <a:ln/>
-        </p:spPr>
-        <p:txBody>
-          <a:bodyPr wrap="square" lIns="0" tIns="0" rIns="0" bIns="0" rtlCol="0" anchor="ctr"/>
-          <a:lstStyle/>
-          <a:p>
-            <a:pPr algn="ctr" indent="0" marL="0">
-              <a:buNone/>
-            </a:pPr>
-            <a:r>
-              <a:rPr lang="en-US" sz="1800" b="1" dirty="0">
-                <a:solidFill>
-                  <a:srgbClr val="FFFFFF"/>
-                </a:solidFill>
-                <a:latin typeface="Cambria" pitchFamily="34" charset="0"/>
-                <a:ea typeface="Cambria" pitchFamily="34" charset="-122"/>
-                <a:cs typeface="Cambria" pitchFamily="34" charset="-120"/>
-              </a:rPr>
-              <a:t>主菜</a:t>
-            </a:r>
-            <a:endParaRPr lang="en-US" sz="1800" dirty="0"/>
-          </a:p>
-        </p:txBody>
-      </p:sp>
-      <p:sp>
-        <p:nvSpPr>
-          <p:cNvPr id="14" name="Text 10"/>
-          <p:cNvSpPr/>
-          <p:nvPr/>
-        </p:nvSpPr>
-        <p:spPr>
-          <a:xfrm>
-            <a:off x="2945740" y="3657600"/>
-            <a:ext cx="1965960" cy="365760"/>
-          </a:xfrm>
-          <a:prstGeom prst="rect">
-            <a:avLst/>
-          </a:prstGeom>
-          <a:noFill/>
-          <a:ln/>
-        </p:spPr>
-        <p:txBody>
-          <a:bodyPr wrap="square" lIns="0" tIns="0" rIns="0" bIns="0" rtlCol="0" anchor="ctr"/>
-          <a:lstStyle/>
-          <a:p>
-            <a:pPr algn="ctr" indent="0" marL="0">
-              <a:buNone/>
-            </a:pPr>
-            <a:r>
-              <a:rPr lang="en-US" sz="1250" dirty="0">
-                <a:solidFill>
-                  <a:srgbClr val="C7D0DE"/>
-                </a:solidFill>
-                <a:latin typeface="Calibri" pitchFamily="34" charset="0"/>
-                <a:ea typeface="Calibri" pitchFamily="34" charset="-122"/>
-                <a:cs typeface="Calibri" pitchFamily="34" charset="-120"/>
-              </a:rPr>
-              <a:t>筋肉</a:t>
-            </a:r>
-            <a:endParaRPr lang="en-US" sz="1250" dirty="0"/>
-          </a:p>
-        </p:txBody>
-      </p:sp>
-      <p:sp>
-        <p:nvSpPr>
-          <p:cNvPr id="15" name="Text 11"/>
-          <p:cNvSpPr/>
-          <p:nvPr/>
-        </p:nvSpPr>
-        <p:spPr>
-          <a:xfrm>
-            <a:off x="3055468" y="1764792"/>
-            <a:ext cx="457200" cy="365760"/>
-          </a:xfrm>
-          <a:prstGeom prst="rect">
-            <a:avLst/>
-          </a:prstGeom>
-          <a:noFill/>
-          <a:ln/>
-        </p:spPr>
-        <p:txBody>
-          <a:bodyPr wrap="square" lIns="0" tIns="0" rIns="0" bIns="0" rtlCol="0" anchor="ctr"/>
-          <a:lstStyle/>
-          <a:p>
-            <a:pPr indent="0" marL="0">
-              <a:buNone/>
-            </a:pPr>
-            <a:r>
-              <a:rPr lang="en-US" sz="1300" b="1" dirty="0">
-                <a:solidFill>
-                  <a:srgbClr val="FFFFFF"/>
-                </a:solidFill>
-                <a:latin typeface="Cambria" pitchFamily="34" charset="0"/>
-                <a:ea typeface="Cambria" pitchFamily="34" charset="-122"/>
-                <a:cs typeface="Cambria" pitchFamily="34" charset="-120"/>
-              </a:rPr>
-              <a:t>2</a:t>
-            </a:r>
-            <a:endParaRPr lang="en-US" sz="1300" dirty="0"/>
-          </a:p>
-        </p:txBody>
-      </p:sp>
-      <p:sp>
-        <p:nvSpPr>
-          <p:cNvPr id="16" name="Shape 12"/>
-          <p:cNvSpPr/>
-          <p:nvPr/>
-        </p:nvSpPr>
-        <p:spPr>
-          <a:xfrm>
-            <a:off x="5112868" y="1691640"/>
-            <a:ext cx="1965960" cy="2880360"/>
-          </a:xfrm>
-          <a:prstGeom prst="roundRect">
-            <a:avLst>
-              <a:gd name="adj" fmla="val 5581"/>
-            </a:avLst>
-          </a:prstGeom>
-          <a:solidFill>
-            <a:srgbClr val="132A46"/>
-          </a:solidFill>
-          <a:ln/>
-        </p:spPr>
-      </p:sp>
-      <p:sp>
-        <p:nvSpPr>
-          <p:cNvPr id="17" name="Shape 13"/>
-          <p:cNvSpPr/>
-          <p:nvPr/>
-        </p:nvSpPr>
-        <p:spPr>
-          <a:xfrm>
-            <a:off x="5638648" y="2011680"/>
-            <a:ext cx="914400" cy="914400"/>
-          </a:xfrm>
-          <a:prstGeom prst="ellipse">
-            <a:avLst/>
-          </a:prstGeom>
-          <a:solidFill>
-            <a:srgbClr val="F2A93B"/>
-          </a:solidFill>
-          <a:ln/>
-        </p:spPr>
-      </p:sp>
-      <p:pic>
-        <p:nvPicPr>
-          <p:cNvPr id="18" name="Image 2" descr="preencoded.png">    </p:cNvPr>
-          <p:cNvPicPr>
-            <a:picLocks noChangeAspect="1"/>
-          </p:cNvPicPr>
-          <p:nvPr/>
-        </p:nvPicPr>
-        <p:blipFill>
-          <a:blip r:embed="rId3"/>
-          <a:stretch>
-            <a:fillRect/>
-          </a:stretch>
-        </p:blipFill>
-        <p:spPr>
-          <a:xfrm>
-            <a:off x="5844388" y="2217420"/>
-            <a:ext cx="502920" cy="502920"/>
-          </a:xfrm>
-          <a:prstGeom prst="rect">
-            <a:avLst/>
-          </a:prstGeom>
-        </p:spPr>
-      </p:pic>
-      <p:sp>
-        <p:nvSpPr>
-          <p:cNvPr id="19" name="Text 14"/>
-          <p:cNvSpPr/>
-          <p:nvPr/>
-        </p:nvSpPr>
-        <p:spPr>
-          <a:xfrm>
-            <a:off x="5112868" y="3154680"/>
-            <a:ext cx="1965960" cy="411480"/>
-          </a:xfrm>
-          <a:prstGeom prst="rect">
-            <a:avLst/>
-          </a:prstGeom>
-          <a:noFill/>
-          <a:ln/>
-        </p:spPr>
-        <p:txBody>
-          <a:bodyPr wrap="square" lIns="0" tIns="0" rIns="0" bIns="0" rtlCol="0" anchor="ctr"/>
-          <a:lstStyle/>
-          <a:p>
-            <a:pPr algn="ctr" indent="0" marL="0">
-              <a:buNone/>
-            </a:pPr>
-            <a:r>
-              <a:rPr lang="en-US" sz="1800" b="1" dirty="0">
-                <a:solidFill>
-                  <a:srgbClr val="FFFFFF"/>
-                </a:solidFill>
-                <a:latin typeface="Cambria" pitchFamily="34" charset="0"/>
-                <a:ea typeface="Cambria" pitchFamily="34" charset="-122"/>
-                <a:cs typeface="Cambria" pitchFamily="34" charset="-120"/>
-              </a:rPr>
-              <a:t>副菜</a:t>
-            </a:r>
-            <a:endParaRPr lang="en-US" sz="1800" dirty="0"/>
-          </a:p>
-        </p:txBody>
-      </p:sp>
-      <p:sp>
-        <p:nvSpPr>
-          <p:cNvPr id="20" name="Text 15"/>
-          <p:cNvSpPr/>
-          <p:nvPr/>
-        </p:nvSpPr>
-        <p:spPr>
-          <a:xfrm>
-            <a:off x="5112868" y="3657600"/>
-            <a:ext cx="1965960" cy="365760"/>
-          </a:xfrm>
-          <a:prstGeom prst="rect">
-            <a:avLst/>
-          </a:prstGeom>
-          <a:noFill/>
-          <a:ln/>
-        </p:spPr>
-        <p:txBody>
-          <a:bodyPr wrap="square" lIns="0" tIns="0" rIns="0" bIns="0" rtlCol="0" anchor="ctr"/>
-          <a:lstStyle/>
-          <a:p>
-            <a:pPr algn="ctr" indent="0" marL="0">
-              <a:buNone/>
-            </a:pPr>
-            <a:r>
-              <a:rPr lang="en-US" sz="1250" dirty="0">
-                <a:solidFill>
-                  <a:srgbClr val="C7D0DE"/>
-                </a:solidFill>
-                <a:latin typeface="Calibri" pitchFamily="34" charset="0"/>
-                <a:ea typeface="Calibri" pitchFamily="34" charset="-122"/>
-                <a:cs typeface="Calibri" pitchFamily="34" charset="-120"/>
-              </a:rPr>
-              <a:t>整える</a:t>
-            </a:r>
-            <a:endParaRPr lang="en-US" sz="1250" dirty="0"/>
-          </a:p>
-        </p:txBody>
-      </p:sp>
-      <p:sp>
-        <p:nvSpPr>
-          <p:cNvPr id="21" name="Text 16"/>
-          <p:cNvSpPr/>
-          <p:nvPr/>
-        </p:nvSpPr>
-        <p:spPr>
-          <a:xfrm>
-            <a:off x="5222596" y="1764792"/>
-            <a:ext cx="457200" cy="365760"/>
-          </a:xfrm>
-          <a:prstGeom prst="rect">
-            <a:avLst/>
-          </a:prstGeom>
-          <a:noFill/>
-          <a:ln/>
-        </p:spPr>
-        <p:txBody>
-          <a:bodyPr wrap="square" lIns="0" tIns="0" rIns="0" bIns="0" rtlCol="0" anchor="ctr"/>
-          <a:lstStyle/>
-          <a:p>
-            <a:pPr indent="0" marL="0">
-              <a:buNone/>
-            </a:pPr>
-            <a:r>
-              <a:rPr lang="en-US" sz="1300" b="1" dirty="0">
-                <a:solidFill>
-                  <a:srgbClr val="FFFFFF"/>
-                </a:solidFill>
-                <a:latin typeface="Cambria" pitchFamily="34" charset="0"/>
-                <a:ea typeface="Cambria" pitchFamily="34" charset="-122"/>
-                <a:cs typeface="Cambria" pitchFamily="34" charset="-120"/>
-              </a:rPr>
-              <a:t>3</a:t>
-            </a:r>
-            <a:endParaRPr lang="en-US" sz="1300" dirty="0"/>
-          </a:p>
-        </p:txBody>
-      </p:sp>
-      <p:sp>
-        <p:nvSpPr>
-          <p:cNvPr id="22" name="Shape 17"/>
-          <p:cNvSpPr/>
-          <p:nvPr/>
-        </p:nvSpPr>
-        <p:spPr>
-          <a:xfrm>
-            <a:off x="7279996" y="1691640"/>
-            <a:ext cx="1965960" cy="2880360"/>
-          </a:xfrm>
-          <a:prstGeom prst="roundRect">
-            <a:avLst>
-              <a:gd name="adj" fmla="val 5581"/>
-            </a:avLst>
-          </a:prstGeom>
-          <a:solidFill>
-            <a:srgbClr val="132A46"/>
-          </a:solidFill>
-          <a:ln/>
-        </p:spPr>
-      </p:sp>
-      <p:sp>
-        <p:nvSpPr>
-          <p:cNvPr id="23" name="Shape 18"/>
-          <p:cNvSpPr/>
-          <p:nvPr/>
-        </p:nvSpPr>
-        <p:spPr>
-          <a:xfrm>
-            <a:off x="7805776" y="2011680"/>
-            <a:ext cx="914400" cy="914400"/>
-          </a:xfrm>
-          <a:prstGeom prst="ellipse">
-            <a:avLst/>
-          </a:prstGeom>
-          <a:solidFill>
-            <a:srgbClr val="F2A93B"/>
-          </a:solidFill>
-          <a:ln/>
-        </p:spPr>
-      </p:sp>
-      <p:pic>
-        <p:nvPicPr>
-          <p:cNvPr id="24" name="Image 3" descr="preencoded.png">    </p:cNvPr>
-          <p:cNvPicPr>
-            <a:picLocks noChangeAspect="1"/>
-          </p:cNvPicPr>
-          <p:nvPr/>
-        </p:nvPicPr>
-        <p:blipFill>
-          <a:blip r:embed="rId4"/>
-          <a:stretch>
-            <a:fillRect/>
-          </a:stretch>
-        </p:blipFill>
-        <p:spPr>
-          <a:xfrm>
-            <a:off x="8011516" y="2217420"/>
-            <a:ext cx="502920" cy="502920"/>
-          </a:xfrm>
-          <a:prstGeom prst="rect">
-            <a:avLst/>
-          </a:prstGeom>
-        </p:spPr>
-      </p:pic>
-      <p:sp>
-        <p:nvSpPr>
-          <p:cNvPr id="25" name="Text 19"/>
-          <p:cNvSpPr/>
-          <p:nvPr/>
-        </p:nvSpPr>
-        <p:spPr>
-          <a:xfrm>
-            <a:off x="7279996" y="3154680"/>
-            <a:ext cx="1965960" cy="411480"/>
-          </a:xfrm>
-          <a:prstGeom prst="rect">
-            <a:avLst/>
-          </a:prstGeom>
-          <a:noFill/>
-          <a:ln/>
-        </p:spPr>
-        <p:txBody>
-          <a:bodyPr wrap="square" lIns="0" tIns="0" rIns="0" bIns="0" rtlCol="0" anchor="ctr"/>
-          <a:lstStyle/>
-          <a:p>
-            <a:pPr algn="ctr" indent="0" marL="0">
-              <a:buNone/>
-            </a:pPr>
-            <a:r>
-              <a:rPr lang="en-US" sz="1800" b="1" dirty="0">
-                <a:solidFill>
-                  <a:srgbClr val="FFFFFF"/>
-                </a:solidFill>
-                <a:latin typeface="Cambria" pitchFamily="34" charset="0"/>
-                <a:ea typeface="Cambria" pitchFamily="34" charset="-122"/>
-                <a:cs typeface="Cambria" pitchFamily="34" charset="-120"/>
-              </a:rPr>
-              <a:t>乳製品</a:t>
-            </a:r>
-            <a:endParaRPr lang="en-US" sz="1800" dirty="0"/>
-          </a:p>
-        </p:txBody>
-      </p:sp>
-      <p:sp>
-        <p:nvSpPr>
-          <p:cNvPr id="26" name="Text 20"/>
-          <p:cNvSpPr/>
-          <p:nvPr/>
-        </p:nvSpPr>
-        <p:spPr>
-          <a:xfrm>
-            <a:off x="7279996" y="3657600"/>
-            <a:ext cx="1965960" cy="365760"/>
-          </a:xfrm>
-          <a:prstGeom prst="rect">
-            <a:avLst/>
-          </a:prstGeom>
-          <a:noFill/>
-          <a:ln/>
-        </p:spPr>
-        <p:txBody>
-          <a:bodyPr wrap="square" lIns="0" tIns="0" rIns="0" bIns="0" rtlCol="0" anchor="ctr"/>
-          <a:lstStyle/>
-          <a:p>
-            <a:pPr algn="ctr" indent="0" marL="0">
-              <a:buNone/>
-            </a:pPr>
-            <a:r>
-              <a:rPr lang="en-US" sz="1250" dirty="0">
-                <a:solidFill>
-                  <a:srgbClr val="C7D0DE"/>
-                </a:solidFill>
-                <a:latin typeface="Calibri" pitchFamily="34" charset="0"/>
-                <a:ea typeface="Calibri" pitchFamily="34" charset="-122"/>
-                <a:cs typeface="Calibri" pitchFamily="34" charset="-120"/>
-              </a:rPr>
-              <a:t>骨</a:t>
-            </a:r>
-            <a:endParaRPr lang="en-US" sz="1250" dirty="0"/>
-          </a:p>
-        </p:txBody>
-      </p:sp>
-      <p:sp>
-        <p:nvSpPr>
-          <p:cNvPr id="27" name="Text 21"/>
-          <p:cNvSpPr/>
-          <p:nvPr/>
-        </p:nvSpPr>
-        <p:spPr>
-          <a:xfrm>
-            <a:off x="7389724" y="1764792"/>
-            <a:ext cx="457200" cy="365760"/>
-          </a:xfrm>
-          <a:prstGeom prst="rect">
-            <a:avLst/>
-          </a:prstGeom>
-          <a:noFill/>
-          <a:ln/>
-        </p:spPr>
-        <p:txBody>
-          <a:bodyPr wrap="square" lIns="0" tIns="0" rIns="0" bIns="0" rtlCol="0" anchor="ctr"/>
-          <a:lstStyle/>
-          <a:p>
-            <a:pPr indent="0" marL="0">
-              <a:buNone/>
-            </a:pPr>
-            <a:r>
-              <a:rPr lang="en-US" sz="1300" b="1" dirty="0">
-                <a:solidFill>
-                  <a:srgbClr val="FFFFFF"/>
-                </a:solidFill>
-                <a:latin typeface="Cambria" pitchFamily="34" charset="0"/>
-                <a:ea typeface="Cambria" pitchFamily="34" charset="-122"/>
-                <a:cs typeface="Cambria" pitchFamily="34" charset="-120"/>
-              </a:rPr>
-              <a:t>4</a:t>
-            </a:r>
-            <a:endParaRPr lang="en-US" sz="1300" dirty="0"/>
-          </a:p>
-        </p:txBody>
-      </p:sp>
-      <p:sp>
-        <p:nvSpPr>
-          <p:cNvPr id="28" name="Shape 22"/>
-          <p:cNvSpPr/>
-          <p:nvPr/>
-        </p:nvSpPr>
-        <p:spPr>
-          <a:xfrm>
-            <a:off x="9447124" y="1691640"/>
-            <a:ext cx="1965960" cy="2880360"/>
-          </a:xfrm>
-          <a:prstGeom prst="roundRect">
-            <a:avLst>
-              <a:gd name="adj" fmla="val 5581"/>
-            </a:avLst>
-          </a:prstGeom>
-          <a:solidFill>
-            <a:srgbClr val="F2A93B"/>
-          </a:solidFill>
-          <a:ln/>
-        </p:spPr>
-      </p:sp>
-      <p:sp>
-        <p:nvSpPr>
-          <p:cNvPr id="29" name="Shape 23"/>
-          <p:cNvSpPr/>
-          <p:nvPr/>
-        </p:nvSpPr>
-        <p:spPr>
-          <a:xfrm>
-            <a:off x="9972904" y="2011680"/>
-            <a:ext cx="914400" cy="914400"/>
-          </a:xfrm>
-          <a:prstGeom prst="ellipse">
-            <a:avLst/>
-          </a:prstGeom>
-          <a:solidFill>
-            <a:srgbClr val="FFFFFF"/>
-          </a:solidFill>
-          <a:ln/>
-        </p:spPr>
-      </p:sp>
-      <p:pic>
-        <p:nvPicPr>
-          <p:cNvPr id="30" name="Image 4" descr="preencoded.png">    </p:cNvPr>
-          <p:cNvPicPr>
-            <a:picLocks noChangeAspect="1"/>
-          </p:cNvPicPr>
-          <p:nvPr/>
-        </p:nvPicPr>
-        <p:blipFill>
-          <a:blip r:embed="rId5"/>
-          <a:stretch>
-            <a:fillRect/>
-          </a:stretch>
-        </p:blipFill>
-        <p:spPr>
-          <a:xfrm>
-            <a:off x="10178644" y="2217420"/>
-            <a:ext cx="502920" cy="502920"/>
-          </a:xfrm>
-          <a:prstGeom prst="rect">
-            <a:avLst/>
-          </a:prstGeom>
-        </p:spPr>
-      </p:pic>
-      <p:sp>
-        <p:nvSpPr>
-          <p:cNvPr id="31" name="Text 24"/>
-          <p:cNvSpPr/>
-          <p:nvPr/>
-        </p:nvSpPr>
-        <p:spPr>
-          <a:xfrm>
-            <a:off x="9447124" y="3154680"/>
-            <a:ext cx="1965960" cy="411480"/>
-          </a:xfrm>
-          <a:prstGeom prst="rect">
-            <a:avLst/>
-          </a:prstGeom>
-          <a:noFill/>
-          <a:ln/>
-        </p:spPr>
-        <p:txBody>
-          <a:bodyPr wrap="square" lIns="0" tIns="0" rIns="0" bIns="0" rtlCol="0" anchor="ctr"/>
-          <a:lstStyle/>
-          <a:p>
-            <a:pPr algn="ctr" indent="0" marL="0">
-              <a:buNone/>
-            </a:pPr>
-            <a:r>
-              <a:rPr lang="en-US" sz="1800" b="1" dirty="0">
-                <a:solidFill>
-                  <a:srgbClr val="FFFFFF"/>
-                </a:solidFill>
-                <a:latin typeface="Cambria" pitchFamily="34" charset="0"/>
-                <a:ea typeface="Cambria" pitchFamily="34" charset="-122"/>
-                <a:cs typeface="Cambria" pitchFamily="34" charset="-120"/>
-              </a:rPr>
-              <a:t>果物</a:t>
-            </a:r>
-            <a:endParaRPr lang="en-US" sz="1800" dirty="0"/>
-          </a:p>
-        </p:txBody>
-      </p:sp>
-      <p:sp>
-        <p:nvSpPr>
-          <p:cNvPr id="32" name="Text 25"/>
-          <p:cNvSpPr/>
-          <p:nvPr/>
-        </p:nvSpPr>
-        <p:spPr>
-          <a:xfrm>
-            <a:off x="9447124" y="3657600"/>
-            <a:ext cx="1965960" cy="365760"/>
-          </a:xfrm>
-          <a:prstGeom prst="rect">
-            <a:avLst/>
-          </a:prstGeom>
-          <a:noFill/>
-          <a:ln/>
-        </p:spPr>
-        <p:txBody>
-          <a:bodyPr wrap="square" lIns="0" tIns="0" rIns="0" bIns="0" rtlCol="0" anchor="ctr"/>
-          <a:lstStyle/>
-          <a:p>
-            <a:pPr algn="ctr" indent="0" marL="0">
-              <a:buNone/>
-            </a:pPr>
-            <a:r>
-              <a:rPr lang="en-US" sz="1250" dirty="0">
-                <a:solidFill>
-                  <a:srgbClr val="0D1F35"/>
-                </a:solidFill>
-                <a:latin typeface="Calibri" pitchFamily="34" charset="0"/>
-                <a:ea typeface="Calibri" pitchFamily="34" charset="-122"/>
-                <a:cs typeface="Calibri" pitchFamily="34" charset="-120"/>
-              </a:rPr>
-              <a:t>回復・補給</a:t>
-            </a:r>
-            <a:endParaRPr lang="en-US" sz="1250" dirty="0"/>
-          </a:p>
-        </p:txBody>
-      </p:sp>
-      <p:sp>
-        <p:nvSpPr>
-          <p:cNvPr id="33" name="Text 26"/>
-          <p:cNvSpPr/>
-          <p:nvPr/>
-        </p:nvSpPr>
-        <p:spPr>
-          <a:xfrm>
-            <a:off x="9556852" y="1764792"/>
-            <a:ext cx="457200" cy="365760"/>
-          </a:xfrm>
-          <a:prstGeom prst="rect">
-            <a:avLst/>
-          </a:prstGeom>
-          <a:noFill/>
-          <a:ln/>
-        </p:spPr>
-        <p:txBody>
-          <a:bodyPr wrap="square" lIns="0" tIns="0" rIns="0" bIns="0" rtlCol="0" anchor="ctr"/>
-          <a:lstStyle/>
-          <a:p>
-            <a:pPr indent="0" marL="0">
-              <a:buNone/>
-            </a:pPr>
-            <a:r>
-              <a:rPr lang="en-US" sz="1300" b="1" dirty="0">
-                <a:solidFill>
-                  <a:srgbClr val="0D1F35"/>
-                </a:solidFill>
-                <a:latin typeface="Cambria" pitchFamily="34" charset="0"/>
-                <a:ea typeface="Cambria" pitchFamily="34" charset="-122"/>
-                <a:cs typeface="Cambria" pitchFamily="34" charset="-120"/>
-              </a:rPr>
-              <a:t>5</a:t>
-            </a:r>
-            <a:endParaRPr lang="en-US" sz="1300" dirty="0"/>
-          </a:p>
-        </p:txBody>
-      </p:sp>
-      <p:sp>
-        <p:nvSpPr>
-          <p:cNvPr id="34" name="Shape 27"/>
-          <p:cNvSpPr/>
-          <p:nvPr/>
-        </p:nvSpPr>
-        <p:spPr>
-          <a:xfrm>
-            <a:off x="731520" y="4892040"/>
-            <a:ext cx="10725912" cy="1234440"/>
-          </a:xfrm>
-          <a:prstGeom prst="roundRect">
-            <a:avLst>
-              <a:gd name="adj" fmla="val 8889"/>
-            </a:avLst>
-          </a:prstGeom>
-          <a:solidFill>
-            <a:srgbClr val="F7F8FA"/>
-          </a:solidFill>
-          <a:ln w="12700">
-            <a:solidFill>
-              <a:srgbClr val="E4E7EC"/>
-            </a:solidFill>
-            <a:prstDash val="solid"/>
-          </a:ln>
-        </p:spPr>
-      </p:sp>
-      <p:sp>
-        <p:nvSpPr>
-          <p:cNvPr id="35" name="Text 28"/>
-          <p:cNvSpPr/>
-          <p:nvPr/>
-        </p:nvSpPr>
-        <p:spPr>
-          <a:xfrm>
-            <a:off x="1005840" y="5020056"/>
-            <a:ext cx="4572000" cy="365760"/>
-          </a:xfrm>
-          <a:prstGeom prst="rect">
-            <a:avLst/>
-          </a:prstGeom>
-          <a:noFill/>
-          <a:ln/>
-        </p:spPr>
-        <p:txBody>
-          <a:bodyPr wrap="square" lIns="0" tIns="0" rIns="0" bIns="0" rtlCol="0" anchor="ctr"/>
-          <a:lstStyle/>
-          <a:p>
-            <a:pPr indent="0" marL="0">
-              <a:buNone/>
-            </a:pPr>
-            <a:r>
-              <a:rPr lang="en-US" sz="1450" b="1" dirty="0">
-                <a:solidFill>
-                  <a:srgbClr val="E08A1E"/>
-                </a:solidFill>
-                <a:latin typeface="Cambria" pitchFamily="34" charset="0"/>
-                <a:ea typeface="Cambria" pitchFamily="34" charset="-122"/>
-                <a:cs typeface="Cambria" pitchFamily="34" charset="-120"/>
-              </a:rPr>
-              <a:t>トップ選手も基本は同じ</a:t>
-            </a:r>
-            <a:endParaRPr lang="en-US" sz="1450" dirty="0"/>
-          </a:p>
-        </p:txBody>
-      </p:sp>
-      <p:sp>
-        <p:nvSpPr>
-          <p:cNvPr id="36" name="Text 29"/>
-          <p:cNvSpPr/>
-          <p:nvPr/>
-        </p:nvSpPr>
-        <p:spPr>
-          <a:xfrm>
-            <a:off x="1005840" y="5394960"/>
-            <a:ext cx="10149840" cy="640080"/>
-          </a:xfrm>
-          <a:prstGeom prst="rect">
-            <a:avLst/>
-          </a:prstGeom>
-          <a:noFill/>
-          <a:ln/>
-        </p:spPr>
-        <p:txBody>
-          <a:bodyPr wrap="square" lIns="0" tIns="0" rIns="0" bIns="0" rtlCol="0" anchor="ctr"/>
-          <a:lstStyle/>
-          <a:p>
-            <a:pPr indent="0" marL="0">
-              <a:lnSpc>
-                <a:spcPts val="1900"/>
-              </a:lnSpc>
-              <a:buNone/>
-            </a:pPr>
-            <a:r>
-              <a:rPr lang="en-US" sz="1250" dirty="0">
-                <a:solidFill>
-                  <a:srgbClr val="1A2233"/>
-                </a:solidFill>
-                <a:latin typeface="Calibri" pitchFamily="34" charset="0"/>
-                <a:ea typeface="Calibri" pitchFamily="34" charset="-122"/>
-                <a:cs typeface="Calibri" pitchFamily="34" charset="-120"/>
-              </a:rPr>
-              <a:t>アスリートの特別な食事も、ベースはこの5つ。これが崩れると「練習しているのに筋肉がつかない」「大事な時期に体調を崩す」といった問題が起こります。</a:t>
-            </a:r>
-            <a:endParaRPr lang="en-US" sz="1250" dirty="0"/>
-          </a:p>
-        </p:txBody>
-      </p:sp>
-      <p:sp>
-        <p:nvSpPr>
-          <p:cNvPr id="37" name="Text 30"/>
-          <p:cNvSpPr/>
-          <p:nvPr/>
-        </p:nvSpPr>
-        <p:spPr>
-          <a:xfrm>
-            <a:off x="457200" y="6473952"/>
-            <a:ext cx="7315200" cy="274320"/>
-          </a:xfrm>
-          <a:prstGeom prst="rect">
-            <a:avLst/>
-          </a:prstGeom>
-          <a:noFill/>
-          <a:ln/>
-        </p:spPr>
-        <p:txBody>
-          <a:bodyPr wrap="square" lIns="0" tIns="0" rIns="0" bIns="0" rtlCol="0" anchor="ctr"/>
-          <a:lstStyle/>
-          <a:p>
-            <a:pPr algn="l" indent="0" marL="0">
-              <a:buNone/>
-            </a:pPr>
-            <a:r>
-              <a:rPr lang="en-US" sz="900" dirty="0">
-                <a:solidFill>
-                  <a:srgbClr val="5B6472"/>
-                </a:solidFill>
-                <a:latin typeface="Calibri" pitchFamily="34" charset="0"/>
-                <a:ea typeface="Calibri" pitchFamily="34" charset="-122"/>
-                <a:cs typeface="Calibri" pitchFamily="34" charset="-120"/>
-              </a:rPr>
-              <a:t>スポーツ管理栄養士講義 ｜ 協力：スミフルジャパン</a:t>
-            </a:r>
-            <a:endParaRPr lang="en-US" sz="900" dirty="0"/>
-          </a:p>
-        </p:txBody>
-      </p:sp>
-      <p:sp>
-        <p:nvSpPr>
-          <p:cNvPr id="38" name="Text 31"/>
-          <p:cNvSpPr/>
-          <p:nvPr/>
-        </p:nvSpPr>
-        <p:spPr>
-          <a:xfrm>
-            <a:off x="11277295" y="6473952"/>
-            <a:ext cx="548640" cy="274320"/>
-          </a:xfrm>
-          <a:prstGeom prst="rect">
-            <a:avLst/>
-          </a:prstGeom>
-          <a:noFill/>
-          <a:ln/>
-        </p:spPr>
-        <p:txBody>
-          <a:bodyPr wrap="square" lIns="0" tIns="0" rIns="0" bIns="0" rtlCol="0" anchor="ctr"/>
-          <a:lstStyle/>
-          <a:p>
-            <a:pPr algn="r" indent="0" marL="0">
-              <a:buNone/>
-            </a:pPr>
-            <a:r>
-              <a:rPr lang="en-US" sz="900" dirty="0">
-                <a:solidFill>
-                  <a:srgbClr val="5B6472"/>
-                </a:solidFill>
-                <a:latin typeface="Calibri" pitchFamily="34" charset="0"/>
-                <a:ea typeface="Calibri" pitchFamily="34" charset="-122"/>
-                <a:cs typeface="Calibri" pitchFamily="34" charset="-120"/>
-              </a:rPr>
-              <a:t>09</a:t>
-            </a:r>
-            <a:endParaRPr lang="en-US" sz="900" dirty="0"/>
-          </a:p>
-        </p:txBody>
-      </p:sp>
     </p:spTree>
   </p:cSld>
   <p:clrMapOvr>
